--- a/kong_chatbot_architecture.pptx
+++ b/kong_chatbot_architecture.pptx
@@ -18,8 +18,8 @@
     <p:sldId id="263" r:id="rId9"/>
     <p:sldId id="264" r:id="rId10"/>
     <p:sldId id="265" r:id="rId11"/>
-    <p:sldId id="266" r:id="rId12"/>
-    <p:sldId id="267" r:id="rId13"/>
+    <p:sldId id="267" r:id="rId12"/>
+    <p:sldId id="266" r:id="rId13"/>
     <p:sldId id="268" r:id="rId14"/>
   </p:sldIdLst>
   <p:sldSz cx="12192000" cy="6858000"/>
@@ -119,6 +119,11 @@
       </a:defRPr>
     </a:lvl9pPr>
   </p:defaultTextStyle>
+  <p:extLst>
+    <p:ext uri="{EFAFB233-063F-42B5-8137-9DF3F51BA10A}">
+      <p15:sldGuideLst xmlns:p15="http://schemas.microsoft.com/office/powerpoint/2012/main"/>
+    </p:ext>
+  </p:extLst>
 </p:presentation>
 </file>
 
@@ -859,7 +864,7 @@
       </p:grpSpPr>
       <p:sp>
         <p:nvSpPr>
-          <p:cNvPr id="399" name="PlaceHolder 1"/>
+          <p:cNvPr id="402" name="PlaceHolder 1"/>
           <p:cNvSpPr>
             <a:spLocks noGrp="1" noRot="1" noChangeAspect="1"/>
           </p:cNvSpPr>
@@ -882,7 +887,7 @@
       </p:sp>
       <p:sp>
         <p:nvSpPr>
-          <p:cNvPr id="400" name="PlaceHolder 2"/>
+          <p:cNvPr id="403" name="PlaceHolder 2"/>
           <p:cNvSpPr>
             <a:spLocks noGrp="1"/>
           </p:cNvSpPr>
@@ -924,19 +929,19 @@
                 <a:uFillTx/>
                 <a:latin typeface="Arial"/>
               </a:rPr>
-              <a:t>Local published ports bind to loopback; Kong's Admin API and the Redis service are not published to the host in the provided stacks. Konnect mode sends provider credentials to Kong configuration and sends documents to the external embedding provider during ingestion. Only use data approved for those services. Keep generated credentials, certificates, and Terraform state private; Terraform state contains the Redis password. This is a development/reference deployment. Before exposing it, add authentication/authorization, tenant-scoped retrieval, access controls, TLS, secret management, monitoring, backups, retention policy, and capacity planning. System instructions and similarity thresholds are not security boundaries; the support prompt is not a moderation/guardrail plugin.</a:t>
-            </a:r>
-          </a:p>
-        </p:txBody>
-      </p:sp>
-      <p:sp>
-        <p:nvSpPr>
-          <p:cNvPr id="401" name="PlaceHolder 3"/>
+              <a:t>Close by highlighting the architecture's central design choice: keep the client API consistent while making retrieval and model connectivity selectable by deployment mode. Suggested demo: start with `make up`, ask about the release checklist via `POST /api/rag/chat`, then contrast the local and Konnect architecture. Sample request: {"message":"What is the project release checklist?"}</a:t>
+            </a:r>
+          </a:p>
+        </p:txBody>
+      </p:sp>
+      <p:sp>
+        <p:nvSpPr>
+          <p:cNvPr id="404" name="PlaceHolder 3"/>
           <p:cNvSpPr>
             <a:spLocks noGrp="1"/>
           </p:cNvSpPr>
           <p:nvPr>
-            <p:ph type="sldNum" idx="47"/>
+            <p:ph type="sldNum" idx="48"/>
           </p:nvPr>
         </p:nvSpPr>
         <p:spPr>
@@ -999,7 +1004,7 @@
       </p:grpSpPr>
       <p:sp>
         <p:nvSpPr>
-          <p:cNvPr id="402" name="PlaceHolder 1"/>
+          <p:cNvPr id="399" name="PlaceHolder 1"/>
           <p:cNvSpPr>
             <a:spLocks noGrp="1" noRot="1" noChangeAspect="1"/>
           </p:cNvSpPr>
@@ -1022,7 +1027,7 @@
       </p:sp>
       <p:sp>
         <p:nvSpPr>
-          <p:cNvPr id="403" name="PlaceHolder 2"/>
+          <p:cNvPr id="400" name="PlaceHolder 2"/>
           <p:cNvSpPr>
             <a:spLocks noGrp="1"/>
           </p:cNvSpPr>
@@ -1064,19 +1069,19 @@
                 <a:uFillTx/>
                 <a:latin typeface="Arial"/>
               </a:rPr>
-              <a:t>Close by highlighting the architecture's central design choice: keep the client API consistent while making retrieval and model connectivity selectable by deployment mode. Suggested demo: start with `make up`, ask about the release checklist via `POST /api/rag/chat`, then contrast the local and Konnect architecture. Sample request: {"message":"What is the project release checklist?"}</a:t>
-            </a:r>
-          </a:p>
-        </p:txBody>
-      </p:sp>
-      <p:sp>
-        <p:nvSpPr>
-          <p:cNvPr id="404" name="PlaceHolder 3"/>
+              <a:t>Local published ports bind to loopback; Kong's Admin API and the Redis service are not published to the host in the provided stacks. Konnect mode sends provider credentials to Kong configuration and sends documents to the external embedding provider during ingestion. Only use data approved for those services. Keep generated credentials, certificates, and Terraform state private; Terraform state contains the Redis password. This is a development/reference deployment. Before exposing it, add authentication/authorization, tenant-scoped retrieval, access controls, TLS, secret management, monitoring, backups, retention policy, and capacity planning. System instructions and similarity thresholds are not security boundaries; the support prompt is not a moderation/guardrail plugin.</a:t>
+            </a:r>
+          </a:p>
+        </p:txBody>
+      </p:sp>
+      <p:sp>
+        <p:nvSpPr>
+          <p:cNvPr id="401" name="PlaceHolder 3"/>
           <p:cNvSpPr>
             <a:spLocks noGrp="1"/>
           </p:cNvSpPr>
           <p:nvPr>
-            <p:ph type="sldNum" idx="48"/>
+            <p:ph type="sldNum" idx="47"/>
           </p:nvPr>
         </p:nvSpPr>
         <p:spPr>
@@ -10883,16 +10888,42 @@
           </a:xfrm>
           <a:prstGeom prst="roundRect">
             <a:avLst>
-              <a:gd name="adj" fmla="val 16667"/>
+              <a:gd name="adj" fmla="val 3741"/>
             </a:avLst>
           </a:prstGeom>
           <a:solidFill>
             <a:srgbClr val="141D33"/>
           </a:solidFill>
           <a:ln w="12700">
-            <a:solidFill>
-              <a:srgbClr val="1A2641"/>
-            </a:solidFill>
+            <a:gradFill>
+              <a:gsLst>
+                <a:gs pos="0">
+                  <a:schemeClr val="accent1">
+                    <a:lumMod val="5000"/>
+                    <a:lumOff val="95000"/>
+                  </a:schemeClr>
+                </a:gs>
+                <a:gs pos="74000">
+                  <a:schemeClr val="accent1">
+                    <a:lumMod val="45000"/>
+                    <a:lumOff val="55000"/>
+                  </a:schemeClr>
+                </a:gs>
+                <a:gs pos="83000">
+                  <a:schemeClr val="accent1">
+                    <a:lumMod val="45000"/>
+                    <a:lumOff val="55000"/>
+                  </a:schemeClr>
+                </a:gs>
+                <a:gs pos="100000">
+                  <a:schemeClr val="accent1">
+                    <a:lumMod val="30000"/>
+                    <a:lumOff val="70000"/>
+                  </a:schemeClr>
+                </a:gs>
+              </a:gsLst>
+              <a:lin ang="5400000" scaled="1"/>
+            </a:gradFill>
             <a:round/>
           </a:ln>
           <a:effectLst>
@@ -11426,9 +11457,35 @@
             <a:srgbClr val="141D33"/>
           </a:solidFill>
           <a:ln w="12700">
-            <a:solidFill>
-              <a:srgbClr val="1A2641"/>
-            </a:solidFill>
+            <a:gradFill>
+              <a:gsLst>
+                <a:gs pos="0">
+                  <a:schemeClr val="accent1">
+                    <a:lumMod val="5000"/>
+                    <a:lumOff val="95000"/>
+                  </a:schemeClr>
+                </a:gs>
+                <a:gs pos="74000">
+                  <a:schemeClr val="accent1">
+                    <a:lumMod val="45000"/>
+                    <a:lumOff val="55000"/>
+                  </a:schemeClr>
+                </a:gs>
+                <a:gs pos="83000">
+                  <a:schemeClr val="accent1">
+                    <a:lumMod val="45000"/>
+                    <a:lumOff val="55000"/>
+                  </a:schemeClr>
+                </a:gs>
+                <a:gs pos="100000">
+                  <a:schemeClr val="accent1">
+                    <a:lumMod val="30000"/>
+                    <a:lumOff val="70000"/>
+                  </a:schemeClr>
+                </a:gs>
+              </a:gsLst>
+              <a:lin ang="5400000" scaled="1"/>
+            </a:gradFill>
             <a:round/>
           </a:ln>
           <a:effectLst>
@@ -11839,9 +11896,35 @@
             <a:srgbClr val="141D33"/>
           </a:solidFill>
           <a:ln w="12700">
-            <a:solidFill>
-              <a:srgbClr val="1A2641"/>
-            </a:solidFill>
+            <a:gradFill>
+              <a:gsLst>
+                <a:gs pos="0">
+                  <a:schemeClr val="accent1">
+                    <a:lumMod val="5000"/>
+                    <a:lumOff val="95000"/>
+                  </a:schemeClr>
+                </a:gs>
+                <a:gs pos="74000">
+                  <a:schemeClr val="accent1">
+                    <a:lumMod val="45000"/>
+                    <a:lumOff val="55000"/>
+                  </a:schemeClr>
+                </a:gs>
+                <a:gs pos="83000">
+                  <a:schemeClr val="accent1">
+                    <a:lumMod val="45000"/>
+                    <a:lumOff val="55000"/>
+                  </a:schemeClr>
+                </a:gs>
+                <a:gs pos="100000">
+                  <a:schemeClr val="accent1">
+                    <a:lumMod val="30000"/>
+                    <a:lumOff val="70000"/>
+                  </a:schemeClr>
+                </a:gs>
+              </a:gsLst>
+              <a:lin ang="5400000" scaled="1"/>
+            </a:gradFill>
             <a:round/>
           </a:ln>
           <a:effectLst>
@@ -12120,7 +12203,7 @@
               </a:spcAft>
             </a:pPr>
             <a:r>
-              <a:rPr lang="en-US" sz="1100" b="0" u="none" strike="noStrike">
+              <a:rPr lang="en-US" sz="1100" b="0" u="none" strike="noStrike" dirty="0">
                 <a:solidFill>
                   <a:srgbClr val="A07DFF"/>
                 </a:solidFill>
@@ -12131,7 +12214,7 @@
               <a:t>●  </a:t>
             </a:r>
             <a:r>
-              <a:rPr lang="en-US" sz="1200" b="0" u="none" strike="noStrike">
+              <a:rPr lang="en-US" sz="1200" b="0" u="none" strike="noStrike" dirty="0">
                 <a:solidFill>
                   <a:srgbClr val="F4F7FF"/>
                 </a:solidFill>
@@ -12141,7 +12224,7 @@
               </a:rPr>
               <a:t>Docker networks + images</a:t>
             </a:r>
-            <a:endParaRPr lang="en-US" sz="1200" b="0" u="none" strike="noStrike">
+            <a:endParaRPr lang="en-US" sz="1200" b="0" u="none" strike="noStrike" dirty="0">
               <a:solidFill>
                 <a:srgbClr val="FFFFFF"/>
               </a:solidFill>
@@ -12160,7 +12243,7 @@
               </a:spcAft>
             </a:pPr>
             <a:r>
-              <a:rPr lang="en-US" sz="1100" b="0" u="none" strike="noStrike">
+              <a:rPr lang="en-US" sz="1100" b="0" u="none" strike="noStrike" dirty="0">
                 <a:solidFill>
                   <a:srgbClr val="A07DFF"/>
                 </a:solidFill>
@@ -12171,7 +12254,7 @@
               <a:t>●  </a:t>
             </a:r>
             <a:r>
-              <a:rPr lang="en-US" sz="1200" b="0" u="none" strike="noStrike">
+              <a:rPr lang="en-US" sz="1200" b="0" u="none" strike="noStrike" dirty="0">
                 <a:solidFill>
                   <a:srgbClr val="F4F7FF"/>
                 </a:solidFill>
@@ -12181,7 +12264,7 @@
               </a:rPr>
               <a:t>Containers, volumes and ports</a:t>
             </a:r>
-            <a:endParaRPr lang="en-US" sz="1200" b="0" u="none" strike="noStrike">
+            <a:endParaRPr lang="en-US" sz="1200" b="0" u="none" strike="noStrike" dirty="0">
               <a:solidFill>
                 <a:srgbClr val="FFFFFF"/>
               </a:solidFill>
@@ -12200,7 +12283,7 @@
               </a:spcAft>
             </a:pPr>
             <a:r>
-              <a:rPr lang="en-US" sz="1100" b="0" u="none" strike="noStrike">
+              <a:rPr lang="en-US" sz="1100" b="0" u="none" strike="noStrike" dirty="0">
                 <a:solidFill>
                   <a:srgbClr val="A07DFF"/>
                 </a:solidFill>
@@ -12211,7 +12294,7 @@
               <a:t>●  </a:t>
             </a:r>
             <a:r>
-              <a:rPr lang="en-US" sz="1200" b="0" u="none" strike="noStrike">
+              <a:rPr lang="en-US" sz="1200" b="0" u="none" strike="noStrike" dirty="0">
                 <a:solidFill>
                   <a:srgbClr val="F4F7FF"/>
                 </a:solidFill>
@@ -12221,7 +12304,7 @@
               </a:rPr>
               <a:t>Variable selects local / Konnect</a:t>
             </a:r>
-            <a:endParaRPr lang="en-US" sz="1200" b="0" u="none" strike="noStrike">
+            <a:endParaRPr lang="en-US" sz="1200" b="0" u="none" strike="noStrike" dirty="0">
               <a:solidFill>
                 <a:srgbClr val="FFFFFF"/>
               </a:solidFill>
@@ -12879,14 +12962,14 @@
       </p:grpSpPr>
       <p:sp>
         <p:nvSpPr>
-          <p:cNvPr id="320" name="TextBox 1"/>
+          <p:cNvPr id="335" name="TextBox 1"/>
           <p:cNvSpPr/>
           <p:nvPr/>
         </p:nvSpPr>
         <p:spPr>
           <a:xfrm>
             <a:off x="567000" y="320040"/>
-            <a:ext cx="4937400" cy="255600"/>
+            <a:ext cx="4937400" cy="228045"/>
           </a:xfrm>
           <a:prstGeom prst="rect">
             <a:avLst/>
@@ -12923,17 +13006,26 @@
               </a:spcAft>
             </a:pPr>
             <a:r>
-              <a:rPr lang="en-US" sz="1000" b="1" u="none" strike="noStrike">
+              <a:rPr lang="en-US" sz="1000" b="1" dirty="0">
                 <a:solidFill>
                   <a:srgbClr val="42D3E6"/>
                 </a:solidFill>
-                <a:effectLst/>
-                <a:uFillTx/>
                 <a:latin typeface="Aptos"/>
               </a:rPr>
-              <a:t>09 • SECURITY &amp; OPERATIONS</a:t>
-            </a:r>
-            <a:endParaRPr lang="en-US" sz="1000" b="0" u="none" strike="noStrike">
+              <a:t>09</a:t>
+            </a:r>
+            <a:r>
+              <a:rPr lang="en-US" sz="1000" b="1" u="none" strike="noStrike" dirty="0">
+                <a:solidFill>
+                  <a:srgbClr val="42D3E6"/>
+                </a:solidFill>
+                <a:effectLst/>
+                <a:uFillTx/>
+                <a:latin typeface="Aptos"/>
+              </a:rPr>
+              <a:t> • WRAP-UP</a:t>
+            </a:r>
+            <a:endParaRPr lang="en-US" sz="1000" b="0" u="none" strike="noStrike" dirty="0">
               <a:solidFill>
                 <a:srgbClr val="FFFFFF"/>
               </a:solidFill>
@@ -12946,7 +13038,7 @@
       </p:sp>
       <p:sp>
         <p:nvSpPr>
-          <p:cNvPr id="321" name="TextBox 2"/>
+          <p:cNvPr id="336" name="TextBox 2"/>
           <p:cNvSpPr/>
           <p:nvPr/>
         </p:nvSpPr>
@@ -12998,7 +13090,7 @@
                 <a:uFillTx/>
                 <a:latin typeface="Aptos"/>
               </a:rPr>
-              <a:t>Operations, trust boundaries, and production gaps</a:t>
+              <a:t>Takeaways and a practical walkthrough</a:t>
             </a:r>
             <a:endParaRPr lang="en-US" sz="2700" b="0" u="none" strike="noStrike">
               <a:solidFill>
@@ -13013,7 +13105,7 @@
       </p:sp>
       <p:sp>
         <p:nvSpPr>
-          <p:cNvPr id="322" name="TextBox 3"/>
+          <p:cNvPr id="337" name="TextBox 3"/>
           <p:cNvSpPr/>
           <p:nvPr/>
         </p:nvSpPr>
@@ -13065,7 +13157,7 @@
                 <a:uFillTx/>
                 <a:latin typeface="Aptos"/>
               </a:rPr>
-              <a:t>A successful smoke test proves a path works — not that it is production-secure.</a:t>
+              <a:t>Keep the client API consistent while making retrieval and model connectivity selectable.</a:t>
             </a:r>
             <a:endParaRPr lang="en-US" sz="1200" b="0" u="none" strike="noStrike">
               <a:solidFill>
@@ -13080,7 +13172,7 @@
       </p:sp>
       <p:sp>
         <p:nvSpPr>
-          <p:cNvPr id="323" name="Rectangle 4"/>
+          <p:cNvPr id="338" name="Rectangle 4"/>
           <p:cNvSpPr/>
           <p:nvPr/>
         </p:nvSpPr>
@@ -13137,7 +13229,7 @@
       </p:sp>
       <p:sp>
         <p:nvSpPr>
-          <p:cNvPr id="324" name="TextBox 5"/>
+          <p:cNvPr id="339" name="TextBox 5"/>
           <p:cNvSpPr/>
           <p:nvPr/>
         </p:nvSpPr>
@@ -13189,7 +13281,7 @@
                 <a:uFillTx/>
                 <a:latin typeface="Aptos"/>
               </a:rPr>
-              <a:t>KONG CHATBOT ARCHITECTURE   •   09 / 10</a:t>
+              <a:t>KONG CHATBOT ARCHITECTURE   •   10 / 10</a:t>
             </a:r>
             <a:endParaRPr lang="en-US" sz="800" b="0" u="none" strike="noStrike">
               <a:solidFill>
@@ -13204,14 +13296,14 @@
       </p:sp>
       <p:sp>
         <p:nvSpPr>
-          <p:cNvPr id="325" name="Rounded Rectangle 6"/>
+          <p:cNvPr id="340" name="Rounded Rectangle 6"/>
           <p:cNvSpPr/>
           <p:nvPr/>
         </p:nvSpPr>
         <p:spPr>
           <a:xfrm>
-            <a:off x="640080" y="1993320"/>
-            <a:ext cx="5348880" cy="3611520"/>
+            <a:off x="685800" y="1965960"/>
+            <a:ext cx="5623200" cy="566640"/>
           </a:xfrm>
           <a:prstGeom prst="roundRect">
             <a:avLst>
@@ -13222,9 +13314,35 @@
             <a:srgbClr val="141D33"/>
           </a:solidFill>
           <a:ln w="12700">
-            <a:solidFill>
-              <a:srgbClr val="1A2641"/>
-            </a:solidFill>
+            <a:gradFill>
+              <a:gsLst>
+                <a:gs pos="0">
+                  <a:schemeClr val="accent1">
+                    <a:lumMod val="5000"/>
+                    <a:lumOff val="95000"/>
+                  </a:schemeClr>
+                </a:gs>
+                <a:gs pos="74000">
+                  <a:schemeClr val="accent1">
+                    <a:lumMod val="45000"/>
+                    <a:lumOff val="55000"/>
+                  </a:schemeClr>
+                </a:gs>
+                <a:gs pos="83000">
+                  <a:schemeClr val="accent1">
+                    <a:lumMod val="45000"/>
+                    <a:lumOff val="55000"/>
+                  </a:schemeClr>
+                </a:gs>
+                <a:gs pos="100000">
+                  <a:schemeClr val="accent1">
+                    <a:lumMod val="30000"/>
+                    <a:lumOff val="70000"/>
+                  </a:schemeClr>
+                </a:gs>
+              </a:gsLst>
+              <a:lin ang="5400000" scaled="1"/>
+            </a:gradFill>
             <a:round/>
           </a:ln>
           <a:effectLst>
@@ -13266,14 +13384,148 @@
       </p:sp>
       <p:sp>
         <p:nvSpPr>
-          <p:cNvPr id="326" name="Rounded Rectangle 7"/>
+          <p:cNvPr id="341" name="TextBox 7"/>
           <p:cNvSpPr/>
           <p:nvPr/>
         </p:nvSpPr>
         <p:spPr>
           <a:xfrm>
-            <a:off x="914400" y="2286000"/>
-            <a:ext cx="1737000" cy="292320"/>
+            <a:off x="914400" y="2103120"/>
+            <a:ext cx="1691280" cy="219240"/>
+          </a:xfrm>
+          <a:prstGeom prst="rect">
+            <a:avLst/>
+          </a:prstGeom>
+          <a:noFill/>
+          <a:ln w="0">
+            <a:noFill/>
+          </a:ln>
+        </p:spPr>
+        <p:style>
+          <a:lnRef idx="0">
+            <a:scrgbClr r="0" g="0" b="0"/>
+          </a:lnRef>
+          <a:fillRef idx="0">
+            <a:scrgbClr r="0" g="0" b="0"/>
+          </a:fillRef>
+          <a:effectRef idx="0">
+            <a:scrgbClr r="0" g="0" b="0"/>
+          </a:effectRef>
+          <a:fontRef idx="minor"/>
+        </p:style>
+        <p:txBody>
+          <a:bodyPr lIns="36720" tIns="36720" rIns="36720" bIns="36720" anchor="t">
+            <a:spAutoFit/>
+          </a:bodyPr>
+          <a:lstStyle/>
+          <a:p>
+            <a:pPr defTabSz="457200">
+              <a:lnSpc>
+                <a:spcPct val="100000"/>
+              </a:lnSpc>
+              <a:spcAft>
+                <a:spcPts val="400"/>
+              </a:spcAft>
+            </a:pPr>
+            <a:r>
+              <a:rPr lang="en-US" sz="1300" b="1" u="none" strike="noStrike">
+                <a:solidFill>
+                  <a:srgbClr val="42D3E6"/>
+                </a:solidFill>
+                <a:effectLst/>
+                <a:uFillTx/>
+                <a:latin typeface="Aptos"/>
+              </a:rPr>
+              <a:t>RAG</a:t>
+            </a:r>
+            <a:endParaRPr lang="en-US" sz="1300" b="0" u="none" strike="noStrike">
+              <a:solidFill>
+                <a:srgbClr val="FFFFFF"/>
+              </a:solidFill>
+              <a:effectLst/>
+              <a:uFillTx/>
+              <a:latin typeface="Arial"/>
+            </a:endParaRPr>
+          </a:p>
+        </p:txBody>
+      </p:sp>
+      <p:sp>
+        <p:nvSpPr>
+          <p:cNvPr id="342" name="TextBox 8"/>
+          <p:cNvSpPr/>
+          <p:nvPr/>
+        </p:nvSpPr>
+        <p:spPr>
+          <a:xfrm>
+            <a:off x="2560320" y="2066400"/>
+            <a:ext cx="3474360" cy="356400"/>
+          </a:xfrm>
+          <a:prstGeom prst="rect">
+            <a:avLst/>
+          </a:prstGeom>
+          <a:noFill/>
+          <a:ln w="0">
+            <a:noFill/>
+          </a:ln>
+        </p:spPr>
+        <p:style>
+          <a:lnRef idx="0">
+            <a:scrgbClr r="0" g="0" b="0"/>
+          </a:lnRef>
+          <a:fillRef idx="0">
+            <a:scrgbClr r="0" g="0" b="0"/>
+          </a:fillRef>
+          <a:effectRef idx="0">
+            <a:scrgbClr r="0" g="0" b="0"/>
+          </a:effectRef>
+          <a:fontRef idx="minor"/>
+        </p:style>
+        <p:txBody>
+          <a:bodyPr lIns="36720" tIns="36720" rIns="36720" bIns="36720" anchor="t">
+            <a:spAutoFit/>
+          </a:bodyPr>
+          <a:lstStyle/>
+          <a:p>
+            <a:pPr defTabSz="457200">
+              <a:lnSpc>
+                <a:spcPct val="100000"/>
+              </a:lnSpc>
+              <a:spcAft>
+                <a:spcPts val="400"/>
+              </a:spcAft>
+            </a:pPr>
+            <a:r>
+              <a:rPr lang="en-US" sz="1100" b="0" u="none" strike="noStrike">
+                <a:solidFill>
+                  <a:srgbClr val="F4F7FF"/>
+                </a:solidFill>
+                <a:effectLst/>
+                <a:uFillTx/>
+                <a:latin typeface="Aptos"/>
+              </a:rPr>
+              <a:t>supplies project knowledge and makes source-grounded answers easier to trace.</a:t>
+            </a:r>
+            <a:endParaRPr lang="en-US" sz="1100" b="0" u="none" strike="noStrike">
+              <a:solidFill>
+                <a:srgbClr val="FFFFFF"/>
+              </a:solidFill>
+              <a:effectLst/>
+              <a:uFillTx/>
+              <a:latin typeface="Arial"/>
+            </a:endParaRPr>
+          </a:p>
+        </p:txBody>
+      </p:sp>
+      <p:sp>
+        <p:nvSpPr>
+          <p:cNvPr id="343" name="Rounded Rectangle 9"/>
+          <p:cNvSpPr/>
+          <p:nvPr/>
+        </p:nvSpPr>
+        <p:spPr>
+          <a:xfrm>
+            <a:off x="685800" y="2679120"/>
+            <a:ext cx="5623200" cy="566640"/>
           </a:xfrm>
           <a:prstGeom prst="roundRect">
             <a:avLst>
@@ -13281,10 +13533,39 @@
             </a:avLst>
           </a:prstGeom>
           <a:solidFill>
-            <a:srgbClr val="48E0B8"/>
+            <a:srgbClr val="141D33"/>
           </a:solidFill>
-          <a:ln>
-            <a:noFill/>
+          <a:ln w="12700">
+            <a:gradFill>
+              <a:gsLst>
+                <a:gs pos="0">
+                  <a:schemeClr val="accent1">
+                    <a:lumMod val="5000"/>
+                    <a:lumOff val="95000"/>
+                  </a:schemeClr>
+                </a:gs>
+                <a:gs pos="74000">
+                  <a:schemeClr val="accent1">
+                    <a:lumMod val="45000"/>
+                    <a:lumOff val="55000"/>
+                  </a:schemeClr>
+                </a:gs>
+                <a:gs pos="83000">
+                  <a:schemeClr val="accent1">
+                    <a:lumMod val="45000"/>
+                    <a:lumOff val="55000"/>
+                  </a:schemeClr>
+                </a:gs>
+                <a:gs pos="100000">
+                  <a:schemeClr val="accent1">
+                    <a:lumMod val="30000"/>
+                    <a:lumOff val="70000"/>
+                  </a:schemeClr>
+                </a:gs>
+              </a:gsLst>
+              <a:lin ang="5400000" scaled="1"/>
+            </a:gradFill>
+            <a:round/>
           </a:ln>
           <a:effectLst>
             <a:outerShdw blurRad="39960" dist="23040" dir="5400000" rotWithShape="0">
@@ -13325,14 +13606,14 @@
       </p:sp>
       <p:sp>
         <p:nvSpPr>
-          <p:cNvPr id="327" name="TextBox 8"/>
+          <p:cNvPr id="344" name="TextBox 10"/>
           <p:cNvSpPr/>
           <p:nvPr/>
         </p:nvSpPr>
         <p:spPr>
           <a:xfrm>
-            <a:off x="951120" y="2304360"/>
-            <a:ext cx="1663920" cy="228240"/>
+            <a:off x="914400" y="2816280"/>
+            <a:ext cx="1691280" cy="219240"/>
           </a:xfrm>
           <a:prstGeom prst="rect">
             <a:avLst/>
@@ -13355,12 +13636,12 @@
           <a:fontRef idx="minor"/>
         </p:style>
         <p:txBody>
-          <a:bodyPr lIns="9000" tIns="9000" rIns="9000" bIns="9000" anchor="ctr">
+          <a:bodyPr lIns="36720" tIns="36720" rIns="36720" bIns="36720" anchor="t">
             <a:spAutoFit/>
           </a:bodyPr>
           <a:lstStyle/>
           <a:p>
-            <a:pPr algn="ctr" defTabSz="457200">
+            <a:pPr defTabSz="457200">
               <a:lnSpc>
                 <a:spcPct val="100000"/>
               </a:lnSpc>
@@ -13369,17 +13650,17 @@
               </a:spcAft>
             </a:pPr>
             <a:r>
-              <a:rPr lang="en-US" sz="900" b="1" u="none" strike="noStrike">
-                <a:solidFill>
-                  <a:srgbClr val="0A1020"/>
+              <a:rPr lang="en-US" sz="1300" b="1" u="none" strike="noStrike">
+                <a:solidFill>
+                  <a:srgbClr val="A07DFF"/>
                 </a:solidFill>
                 <a:effectLst/>
                 <a:uFillTx/>
                 <a:latin typeface="Aptos"/>
               </a:rPr>
-              <a:t>CURRENT SAFEGUARDS</a:t>
-            </a:r>
-            <a:endParaRPr lang="en-US" sz="900" b="0" u="none" strike="noStrike">
+              <a:t>Kong Gateway</a:t>
+            </a:r>
+            <a:endParaRPr lang="en-US" sz="1300" b="0" u="none" strike="noStrike">
               <a:solidFill>
                 <a:srgbClr val="FFFFFF"/>
               </a:solidFill>
@@ -13392,14 +13673,14 @@
       </p:sp>
       <p:sp>
         <p:nvSpPr>
-          <p:cNvPr id="328" name="TextBox 9"/>
+          <p:cNvPr id="345" name="TextBox 11"/>
           <p:cNvSpPr/>
           <p:nvPr/>
         </p:nvSpPr>
         <p:spPr>
           <a:xfrm>
-            <a:off x="914400" y="2788920"/>
-            <a:ext cx="4708800" cy="2422800"/>
+            <a:off x="2560320" y="2779920"/>
+            <a:ext cx="3474360" cy="356400"/>
           </a:xfrm>
           <a:prstGeom prst="rect">
             <a:avLst/>
@@ -13422,7 +13703,7 @@
           <a:fontRef idx="minor"/>
         </p:style>
         <p:txBody>
-          <a:bodyPr lIns="45720" tIns="27360" rIns="45720" bIns="27360" anchor="t">
+          <a:bodyPr lIns="36720" tIns="36720" rIns="36720" bIns="36720" anchor="t">
             <a:spAutoFit/>
           </a:bodyPr>
           <a:lstStyle/>
@@ -13432,43 +13713,21 @@
                 <a:spcPct val="100000"/>
               </a:lnSpc>
               <a:spcAft>
-                <a:spcPts val="901"/>
+                <a:spcPts val="400"/>
               </a:spcAft>
             </a:pPr>
             <a:r>
               <a:rPr lang="en-US" sz="1100" b="0" u="none" strike="noStrike">
                 <a:solidFill>
-                  <a:srgbClr val="48E0B8"/>
+                  <a:srgbClr val="F4F7FF"/>
                 </a:solidFill>
                 <a:effectLst/>
                 <a:uFillTx/>
                 <a:latin typeface="Aptos"/>
               </a:rPr>
-              <a:t>●  </a:t>
-            </a:r>
-            <a:r>
-              <a:rPr lang="en-US" sz="1200" b="1" u="none" strike="noStrike">
-                <a:solidFill>
-                  <a:srgbClr val="F4F7FF"/>
-                </a:solidFill>
-                <a:effectLst/>
-                <a:uFillTx/>
-                <a:latin typeface="Aptos"/>
-              </a:rPr>
-              <a:t>Loopback binding. </a:t>
-            </a:r>
-            <a:r>
-              <a:rPr lang="en-US" sz="1200" b="0" u="none" strike="noStrike">
-                <a:solidFill>
-                  <a:srgbClr val="F4F7FF"/>
-                </a:solidFill>
-                <a:effectLst/>
-                <a:uFillTx/>
-                <a:latin typeface="Aptos"/>
-              </a:rPr>
-              <a:t>Local published ports bind to localhost.</a:t>
-            </a:r>
-            <a:endParaRPr lang="en-US" sz="1200" b="0" u="none" strike="noStrike">
+              <a:t>is the shared traffic boundary; Konnect adds centrally managed AI Gateway plugins.</a:t>
+            </a:r>
+            <a:endParaRPr lang="en-US" sz="1100" b="0" u="none" strike="noStrike">
               <a:solidFill>
                 <a:srgbClr val="FFFFFF"/>
               </a:solidFill>
@@ -13477,171 +13736,18 @@
               <a:latin typeface="Arial"/>
             </a:endParaRPr>
           </a:p>
-          <a:p>
-            <a:pPr defTabSz="457200">
-              <a:lnSpc>
-                <a:spcPct val="100000"/>
-              </a:lnSpc>
-              <a:spcAft>
-                <a:spcPts val="901"/>
-              </a:spcAft>
-            </a:pPr>
-            <a:r>
-              <a:rPr lang="en-US" sz="1100" b="0" u="none" strike="noStrike">
-                <a:solidFill>
-                  <a:srgbClr val="48E0B8"/>
-                </a:solidFill>
-                <a:effectLst/>
-                <a:uFillTx/>
-                <a:latin typeface="Aptos"/>
-              </a:rPr>
-              <a:t>●  </a:t>
-            </a:r>
-            <a:r>
-              <a:rPr lang="en-US" sz="1200" b="1" u="none" strike="noStrike">
-                <a:solidFill>
-                  <a:srgbClr val="F4F7FF"/>
-                </a:solidFill>
-                <a:effectLst/>
-                <a:uFillTx/>
-                <a:latin typeface="Aptos"/>
-              </a:rPr>
-              <a:t>Reduced exposure. </a:t>
-            </a:r>
-            <a:r>
-              <a:rPr lang="en-US" sz="1200" b="0" u="none" strike="noStrike">
-                <a:solidFill>
-                  <a:srgbClr val="F4F7FF"/>
-                </a:solidFill>
-                <a:effectLst/>
-                <a:uFillTx/>
-                <a:latin typeface="Aptos"/>
-              </a:rPr>
-              <a:t>Admin API and Redis are not published to the host in the provided stacks.</a:t>
-            </a:r>
-            <a:endParaRPr lang="en-US" sz="1200" b="0" u="none" strike="noStrike">
-              <a:solidFill>
-                <a:srgbClr val="FFFFFF"/>
-              </a:solidFill>
-              <a:effectLst/>
-              <a:uFillTx/>
-              <a:latin typeface="Arial"/>
-            </a:endParaRPr>
-          </a:p>
-          <a:p>
-            <a:pPr defTabSz="457200">
-              <a:lnSpc>
-                <a:spcPct val="100000"/>
-              </a:lnSpc>
-              <a:spcAft>
-                <a:spcPts val="901"/>
-              </a:spcAft>
-            </a:pPr>
-            <a:r>
-              <a:rPr lang="en-US" sz="1100" b="0" u="none" strike="noStrike">
-                <a:solidFill>
-                  <a:srgbClr val="48E0B8"/>
-                </a:solidFill>
-                <a:effectLst/>
-                <a:uFillTx/>
-                <a:latin typeface="Aptos"/>
-              </a:rPr>
-              <a:t>●  </a:t>
-            </a:r>
-            <a:r>
-              <a:rPr lang="en-US" sz="1200" b="1" u="none" strike="noStrike">
-                <a:solidFill>
-                  <a:srgbClr val="F4F7FF"/>
-                </a:solidFill>
-                <a:effectLst/>
-                <a:uFillTx/>
-                <a:latin typeface="Aptos"/>
-              </a:rPr>
-              <a:t>Explicit trust boundaries. </a:t>
-            </a:r>
-            <a:r>
-              <a:rPr lang="en-US" sz="1200" b="0" u="none" strike="noStrike">
-                <a:solidFill>
-                  <a:srgbClr val="F4F7FF"/>
-                </a:solidFill>
-                <a:effectLst/>
-                <a:uFillTx/>
-                <a:latin typeface="Aptos"/>
-              </a:rPr>
-              <a:t>Konnect ingestion sends documents to the external embedding provider.</a:t>
-            </a:r>
-            <a:endParaRPr lang="en-US" sz="1200" b="0" u="none" strike="noStrike">
-              <a:solidFill>
-                <a:srgbClr val="FFFFFF"/>
-              </a:solidFill>
-              <a:effectLst/>
-              <a:uFillTx/>
-              <a:latin typeface="Arial"/>
-            </a:endParaRPr>
-          </a:p>
-          <a:p>
-            <a:pPr defTabSz="457200">
-              <a:lnSpc>
-                <a:spcPct val="100000"/>
-              </a:lnSpc>
-              <a:spcAft>
-                <a:spcPts val="901"/>
-              </a:spcAft>
-            </a:pPr>
-            <a:r>
-              <a:rPr lang="en-US" sz="1100" b="0" u="none" strike="noStrike">
-                <a:solidFill>
-                  <a:srgbClr val="48E0B8"/>
-                </a:solidFill>
-                <a:effectLst/>
-                <a:uFillTx/>
-                <a:latin typeface="Aptos"/>
-              </a:rPr>
-              <a:t>●  </a:t>
-            </a:r>
-            <a:r>
-              <a:rPr lang="en-US" sz="1200" b="1" u="none" strike="noStrike">
-                <a:solidFill>
-                  <a:srgbClr val="F4F7FF"/>
-                </a:solidFill>
-                <a:effectLst/>
-                <a:uFillTx/>
-                <a:latin typeface="Aptos"/>
-              </a:rPr>
-              <a:t>Private state. </a:t>
-            </a:r>
-            <a:r>
-              <a:rPr lang="en-US" sz="1200" b="0" u="none" strike="noStrike">
-                <a:solidFill>
-                  <a:srgbClr val="F4F7FF"/>
-                </a:solidFill>
-                <a:effectLst/>
-                <a:uFillTx/>
-                <a:latin typeface="Aptos"/>
-              </a:rPr>
-              <a:t>Terraform state contains the Redis password; protect credentials and certificates.</a:t>
-            </a:r>
-            <a:endParaRPr lang="en-US" sz="1200" b="0" u="none" strike="noStrike">
-              <a:solidFill>
-                <a:srgbClr val="FFFFFF"/>
-              </a:solidFill>
-              <a:effectLst/>
-              <a:uFillTx/>
-              <a:latin typeface="Arial"/>
-            </a:endParaRPr>
-          </a:p>
-        </p:txBody>
-      </p:sp>
-      <p:sp>
-        <p:nvSpPr>
-          <p:cNvPr id="329" name="Rounded Rectangle 10"/>
+        </p:txBody>
+      </p:sp>
+      <p:sp>
+        <p:nvSpPr>
+          <p:cNvPr id="346" name="Rounded Rectangle 12"/>
           <p:cNvSpPr/>
           <p:nvPr/>
         </p:nvSpPr>
         <p:spPr>
           <a:xfrm>
-            <a:off x="6263640" y="1993320"/>
-            <a:ext cx="5303160" cy="3611520"/>
+            <a:off x="685800" y="3392280"/>
+            <a:ext cx="5623200" cy="566640"/>
           </a:xfrm>
           <a:prstGeom prst="roundRect">
             <a:avLst>
@@ -13649,12 +13755,38 @@
             </a:avLst>
           </a:prstGeom>
           <a:solidFill>
-            <a:srgbClr val="271C24"/>
+            <a:srgbClr val="141D33"/>
           </a:solidFill>
           <a:ln w="12700">
-            <a:solidFill>
-              <a:srgbClr val="704252"/>
-            </a:solidFill>
+            <a:gradFill>
+              <a:gsLst>
+                <a:gs pos="0">
+                  <a:schemeClr val="accent1">
+                    <a:lumMod val="5000"/>
+                    <a:lumOff val="95000"/>
+                  </a:schemeClr>
+                </a:gs>
+                <a:gs pos="74000">
+                  <a:schemeClr val="accent1">
+                    <a:lumMod val="45000"/>
+                    <a:lumOff val="55000"/>
+                  </a:schemeClr>
+                </a:gs>
+                <a:gs pos="83000">
+                  <a:schemeClr val="accent1">
+                    <a:lumMod val="45000"/>
+                    <a:lumOff val="55000"/>
+                  </a:schemeClr>
+                </a:gs>
+                <a:gs pos="100000">
+                  <a:schemeClr val="accent1">
+                    <a:lumMod val="30000"/>
+                    <a:lumOff val="70000"/>
+                  </a:schemeClr>
+                </a:gs>
+              </a:gsLst>
+              <a:lin ang="5400000" scaled="1"/>
+            </a:gradFill>
             <a:round/>
           </a:ln>
           <a:effectLst>
@@ -13696,14 +13828,148 @@
       </p:sp>
       <p:sp>
         <p:nvSpPr>
-          <p:cNvPr id="330" name="Rounded Rectangle 11"/>
+          <p:cNvPr id="347" name="TextBox 13"/>
           <p:cNvSpPr/>
           <p:nvPr/>
         </p:nvSpPr>
         <p:spPr>
           <a:xfrm>
-            <a:off x="6537960" y="2286000"/>
-            <a:ext cx="1737000" cy="292320"/>
+            <a:off x="914400" y="3529440"/>
+            <a:ext cx="1691280" cy="219240"/>
+          </a:xfrm>
+          <a:prstGeom prst="rect">
+            <a:avLst/>
+          </a:prstGeom>
+          <a:noFill/>
+          <a:ln w="0">
+            <a:noFill/>
+          </a:ln>
+        </p:spPr>
+        <p:style>
+          <a:lnRef idx="0">
+            <a:scrgbClr r="0" g="0" b="0"/>
+          </a:lnRef>
+          <a:fillRef idx="0">
+            <a:scrgbClr r="0" g="0" b="0"/>
+          </a:fillRef>
+          <a:effectRef idx="0">
+            <a:scrgbClr r="0" g="0" b="0"/>
+          </a:effectRef>
+          <a:fontRef idx="minor"/>
+        </p:style>
+        <p:txBody>
+          <a:bodyPr lIns="36720" tIns="36720" rIns="36720" bIns="36720" anchor="t">
+            <a:spAutoFit/>
+          </a:bodyPr>
+          <a:lstStyle/>
+          <a:p>
+            <a:pPr defTabSz="457200">
+              <a:lnSpc>
+                <a:spcPct val="100000"/>
+              </a:lnSpc>
+              <a:spcAft>
+                <a:spcPts val="400"/>
+              </a:spcAft>
+            </a:pPr>
+            <a:r>
+              <a:rPr lang="en-US" sz="1300" b="1" u="none" strike="noStrike">
+                <a:solidFill>
+                  <a:srgbClr val="42D3E6"/>
+                </a:solidFill>
+                <a:effectLst/>
+                <a:uFillTx/>
+                <a:latin typeface="Aptos"/>
+              </a:rPr>
+              <a:t>Spring Boot</a:t>
+            </a:r>
+            <a:endParaRPr lang="en-US" sz="1300" b="0" u="none" strike="noStrike">
+              <a:solidFill>
+                <a:srgbClr val="FFFFFF"/>
+              </a:solidFill>
+              <a:effectLst/>
+              <a:uFillTx/>
+              <a:latin typeface="Arial"/>
+            </a:endParaRPr>
+          </a:p>
+        </p:txBody>
+      </p:sp>
+      <p:sp>
+        <p:nvSpPr>
+          <p:cNvPr id="348" name="TextBox 14"/>
+          <p:cNvSpPr/>
+          <p:nvPr/>
+        </p:nvSpPr>
+        <p:spPr>
+          <a:xfrm>
+            <a:off x="2560320" y="3493080"/>
+            <a:ext cx="3474360" cy="356400"/>
+          </a:xfrm>
+          <a:prstGeom prst="rect">
+            <a:avLst/>
+          </a:prstGeom>
+          <a:noFill/>
+          <a:ln w="0">
+            <a:noFill/>
+          </a:ln>
+        </p:spPr>
+        <p:style>
+          <a:lnRef idx="0">
+            <a:scrgbClr r="0" g="0" b="0"/>
+          </a:lnRef>
+          <a:fillRef idx="0">
+            <a:scrgbClr r="0" g="0" b="0"/>
+          </a:fillRef>
+          <a:effectRef idx="0">
+            <a:scrgbClr r="0" g="0" b="0"/>
+          </a:effectRef>
+          <a:fontRef idx="minor"/>
+        </p:style>
+        <p:txBody>
+          <a:bodyPr lIns="36720" tIns="36720" rIns="36720" bIns="36720" anchor="t">
+            <a:spAutoFit/>
+          </a:bodyPr>
+          <a:lstStyle/>
+          <a:p>
+            <a:pPr defTabSz="457200">
+              <a:lnSpc>
+                <a:spcPct val="100000"/>
+              </a:lnSpc>
+              <a:spcAft>
+                <a:spcPts val="400"/>
+              </a:spcAft>
+            </a:pPr>
+            <a:r>
+              <a:rPr lang="en-US" sz="1100" b="0" u="none" strike="noStrike" dirty="0">
+                <a:solidFill>
+                  <a:srgbClr val="F4F7FF"/>
+                </a:solidFill>
+                <a:effectLst/>
+                <a:uFillTx/>
+                <a:latin typeface="Aptos"/>
+              </a:rPr>
+              <a:t>owns the stable API and coordinates chat behavior across both modes.</a:t>
+            </a:r>
+            <a:endParaRPr lang="en-US" sz="1100" b="0" u="none" strike="noStrike" dirty="0">
+              <a:solidFill>
+                <a:srgbClr val="FFFFFF"/>
+              </a:solidFill>
+              <a:effectLst/>
+              <a:uFillTx/>
+              <a:latin typeface="Arial"/>
+            </a:endParaRPr>
+          </a:p>
+        </p:txBody>
+      </p:sp>
+      <p:sp>
+        <p:nvSpPr>
+          <p:cNvPr id="349" name="Rounded Rectangle 15"/>
+          <p:cNvSpPr/>
+          <p:nvPr/>
+        </p:nvSpPr>
+        <p:spPr>
+          <a:xfrm>
+            <a:off x="685800" y="4105800"/>
+            <a:ext cx="5623200" cy="566640"/>
           </a:xfrm>
           <a:prstGeom prst="roundRect">
             <a:avLst>
@@ -13711,10 +13977,39 @@
             </a:avLst>
           </a:prstGeom>
           <a:solidFill>
-            <a:srgbClr val="FF7382"/>
+            <a:srgbClr val="141D33"/>
           </a:solidFill>
-          <a:ln>
-            <a:noFill/>
+          <a:ln w="12700">
+            <a:gradFill>
+              <a:gsLst>
+                <a:gs pos="0">
+                  <a:schemeClr val="accent1">
+                    <a:lumMod val="5000"/>
+                    <a:lumOff val="95000"/>
+                  </a:schemeClr>
+                </a:gs>
+                <a:gs pos="74000">
+                  <a:schemeClr val="accent1">
+                    <a:lumMod val="45000"/>
+                    <a:lumOff val="55000"/>
+                  </a:schemeClr>
+                </a:gs>
+                <a:gs pos="83000">
+                  <a:schemeClr val="accent1">
+                    <a:lumMod val="45000"/>
+                    <a:lumOff val="55000"/>
+                  </a:schemeClr>
+                </a:gs>
+                <a:gs pos="100000">
+                  <a:schemeClr val="accent1">
+                    <a:lumMod val="30000"/>
+                    <a:lumOff val="70000"/>
+                  </a:schemeClr>
+                </a:gs>
+              </a:gsLst>
+              <a:lin ang="5400000" scaled="1"/>
+            </a:gradFill>
+            <a:round/>
           </a:ln>
           <a:effectLst>
             <a:outerShdw blurRad="39960" dist="23040" dir="5400000" rotWithShape="0">
@@ -13755,14 +14050,14 @@
       </p:sp>
       <p:sp>
         <p:nvSpPr>
-          <p:cNvPr id="331" name="TextBox 12"/>
+          <p:cNvPr id="350" name="TextBox 16"/>
           <p:cNvSpPr/>
           <p:nvPr/>
         </p:nvSpPr>
         <p:spPr>
           <a:xfrm>
-            <a:off x="6574680" y="2304360"/>
-            <a:ext cx="1663920" cy="228240"/>
+            <a:off x="914400" y="4242960"/>
+            <a:ext cx="1691280" cy="219240"/>
           </a:xfrm>
           <a:prstGeom prst="rect">
             <a:avLst/>
@@ -13785,12 +14080,12 @@
           <a:fontRef idx="minor"/>
         </p:style>
         <p:txBody>
-          <a:bodyPr lIns="9000" tIns="9000" rIns="9000" bIns="9000" anchor="ctr">
+          <a:bodyPr lIns="36720" tIns="36720" rIns="36720" bIns="36720" anchor="t">
             <a:spAutoFit/>
           </a:bodyPr>
           <a:lstStyle/>
           <a:p>
-            <a:pPr algn="ctr" defTabSz="457200">
+            <a:pPr defTabSz="457200">
               <a:lnSpc>
                 <a:spcPct val="100000"/>
               </a:lnSpc>
@@ -13799,17 +14094,17 @@
               </a:spcAft>
             </a:pPr>
             <a:r>
-              <a:rPr lang="en-US" sz="900" b="1" u="none" strike="noStrike">
-                <a:solidFill>
-                  <a:srgbClr val="0A1020"/>
+              <a:rPr lang="en-US" sz="1300" b="1" u="none" strike="noStrike">
+                <a:solidFill>
+                  <a:srgbClr val="A07DFF"/>
                 </a:solidFill>
                 <a:effectLst/>
                 <a:uFillTx/>
                 <a:latin typeface="Aptos"/>
               </a:rPr>
-              <a:t>BEFORE EXPOSING IT</a:t>
-            </a:r>
-            <a:endParaRPr lang="en-US" sz="900" b="0" u="none" strike="noStrike">
+              <a:t>Infrastructure as Code</a:t>
+            </a:r>
+            <a:endParaRPr lang="en-US" sz="1300" b="0" u="none" strike="noStrike">
               <a:solidFill>
                 <a:srgbClr val="FFFFFF"/>
               </a:solidFill>
@@ -13822,14 +14117,14 @@
       </p:sp>
       <p:sp>
         <p:nvSpPr>
-          <p:cNvPr id="332" name="TextBox 13"/>
+          <p:cNvPr id="351" name="TextBox 17"/>
           <p:cNvSpPr/>
           <p:nvPr/>
         </p:nvSpPr>
         <p:spPr>
           <a:xfrm>
-            <a:off x="6537960" y="2834640"/>
-            <a:ext cx="4617360" cy="2011320"/>
+            <a:off x="2560320" y="4206240"/>
+            <a:ext cx="3474360" cy="356400"/>
           </a:xfrm>
           <a:prstGeom prst="rect">
             <a:avLst/>
@@ -13852,7 +14147,7 @@
           <a:fontRef idx="minor"/>
         </p:style>
         <p:txBody>
-          <a:bodyPr lIns="45720" tIns="27360" rIns="45720" bIns="27360" anchor="t">
+          <a:bodyPr lIns="36720" tIns="36720" rIns="36720" bIns="36720" anchor="t">
             <a:spAutoFit/>
           </a:bodyPr>
           <a:lstStyle/>
@@ -13862,32 +14157,21 @@
                 <a:spcPct val="100000"/>
               </a:lnSpc>
               <a:spcAft>
-                <a:spcPts val="1301"/>
+                <a:spcPts val="400"/>
               </a:spcAft>
             </a:pPr>
             <a:r>
-              <a:rPr lang="en-US" sz="1200" b="0" u="none" strike="noStrike">
-                <a:solidFill>
-                  <a:srgbClr val="FF7382"/>
+              <a:rPr lang="en-US" sz="1100" b="0" u="none" strike="noStrike">
+                <a:solidFill>
+                  <a:srgbClr val="F4F7FF"/>
                 </a:solidFill>
                 <a:effectLst/>
                 <a:uFillTx/>
                 <a:latin typeface="Aptos"/>
               </a:rPr>
-              <a:t>●  </a:t>
-            </a:r>
-            <a:r>
-              <a:rPr lang="en-US" sz="1300" b="0" u="none" strike="noStrike">
-                <a:solidFill>
-                  <a:srgbClr val="F4F7FF"/>
-                </a:solidFill>
-                <a:effectLst/>
-                <a:uFillTx/>
-                <a:latin typeface="Aptos"/>
-              </a:rPr>
-              <a:t>Authentication and authorization</a:t>
-            </a:r>
-            <a:endParaRPr lang="en-US" sz="1300" b="0" u="none" strike="noStrike">
+              <a:t>captures repeatable development setup — production still needs platform-specific controls.</a:t>
+            </a:r>
+            <a:endParaRPr lang="en-US" sz="1100" b="0" u="none" strike="noStrike">
               <a:solidFill>
                 <a:srgbClr val="FFFFFF"/>
               </a:solidFill>
@@ -13896,138 +14180,18 @@
               <a:latin typeface="Arial"/>
             </a:endParaRPr>
           </a:p>
-          <a:p>
-            <a:pPr defTabSz="457200">
-              <a:lnSpc>
-                <a:spcPct val="100000"/>
-              </a:lnSpc>
-              <a:spcAft>
-                <a:spcPts val="1301"/>
-              </a:spcAft>
-            </a:pPr>
-            <a:r>
-              <a:rPr lang="en-US" sz="1200" b="0" u="none" strike="noStrike">
-                <a:solidFill>
-                  <a:srgbClr val="FF7382"/>
-                </a:solidFill>
-                <a:effectLst/>
-                <a:uFillTx/>
-                <a:latin typeface="Aptos"/>
-              </a:rPr>
-              <a:t>●  </a:t>
-            </a:r>
-            <a:r>
-              <a:rPr lang="en-US" sz="1300" b="0" u="none" strike="noStrike">
-                <a:solidFill>
-                  <a:srgbClr val="F4F7FF"/>
-                </a:solidFill>
-                <a:effectLst/>
-                <a:uFillTx/>
-                <a:latin typeface="Aptos"/>
-              </a:rPr>
-              <a:t>Tenant-scoped retrieval and access controls</a:t>
-            </a:r>
-            <a:endParaRPr lang="en-US" sz="1300" b="0" u="none" strike="noStrike">
-              <a:solidFill>
-                <a:srgbClr val="FFFFFF"/>
-              </a:solidFill>
-              <a:effectLst/>
-              <a:uFillTx/>
-              <a:latin typeface="Arial"/>
-            </a:endParaRPr>
-          </a:p>
-          <a:p>
-            <a:pPr defTabSz="457200">
-              <a:lnSpc>
-                <a:spcPct val="100000"/>
-              </a:lnSpc>
-              <a:spcAft>
-                <a:spcPts val="1301"/>
-              </a:spcAft>
-            </a:pPr>
-            <a:r>
-              <a:rPr lang="en-US" sz="1200" b="0" u="none" strike="noStrike">
-                <a:solidFill>
-                  <a:srgbClr val="FF7382"/>
-                </a:solidFill>
-                <a:effectLst/>
-                <a:uFillTx/>
-                <a:latin typeface="Aptos"/>
-              </a:rPr>
-              <a:t>●  </a:t>
-            </a:r>
-            <a:r>
-              <a:rPr lang="en-US" sz="1300" b="0" u="none" strike="noStrike">
-                <a:solidFill>
-                  <a:srgbClr val="F4F7FF"/>
-                </a:solidFill>
-                <a:effectLst/>
-                <a:uFillTx/>
-                <a:latin typeface="Aptos"/>
-              </a:rPr>
-              <a:t>TLS, secret management and monitoring</a:t>
-            </a:r>
-            <a:endParaRPr lang="en-US" sz="1300" b="0" u="none" strike="noStrike">
-              <a:solidFill>
-                <a:srgbClr val="FFFFFF"/>
-              </a:solidFill>
-              <a:effectLst/>
-              <a:uFillTx/>
-              <a:latin typeface="Arial"/>
-            </a:endParaRPr>
-          </a:p>
-          <a:p>
-            <a:pPr defTabSz="457200">
-              <a:lnSpc>
-                <a:spcPct val="100000"/>
-              </a:lnSpc>
-              <a:spcAft>
-                <a:spcPts val="1301"/>
-              </a:spcAft>
-            </a:pPr>
-            <a:r>
-              <a:rPr lang="en-US" sz="1200" b="0" u="none" strike="noStrike">
-                <a:solidFill>
-                  <a:srgbClr val="FF7382"/>
-                </a:solidFill>
-                <a:effectLst/>
-                <a:uFillTx/>
-                <a:latin typeface="Aptos"/>
-              </a:rPr>
-              <a:t>●  </a:t>
-            </a:r>
-            <a:r>
-              <a:rPr lang="en-US" sz="1300" b="0" u="none" strike="noStrike">
-                <a:solidFill>
-                  <a:srgbClr val="F4F7FF"/>
-                </a:solidFill>
-                <a:effectLst/>
-                <a:uFillTx/>
-                <a:latin typeface="Aptos"/>
-              </a:rPr>
-              <a:t>Backups, retention and capacity planning</a:t>
-            </a:r>
-            <a:endParaRPr lang="en-US" sz="1300" b="0" u="none" strike="noStrike">
-              <a:solidFill>
-                <a:srgbClr val="FFFFFF"/>
-              </a:solidFill>
-              <a:effectLst/>
-              <a:uFillTx/>
-              <a:latin typeface="Arial"/>
-            </a:endParaRPr>
-          </a:p>
-        </p:txBody>
-      </p:sp>
-      <p:sp>
-        <p:nvSpPr>
-          <p:cNvPr id="333" name="Rounded Rectangle 14"/>
+        </p:txBody>
+      </p:sp>
+      <p:sp>
+        <p:nvSpPr>
+          <p:cNvPr id="352" name="Rounded Rectangle 18"/>
           <p:cNvSpPr/>
           <p:nvPr/>
         </p:nvSpPr>
         <p:spPr>
           <a:xfrm>
-            <a:off x="1097280" y="5806440"/>
-            <a:ext cx="10012320" cy="456840"/>
+            <a:off x="6720840" y="1965960"/>
+            <a:ext cx="4800240" cy="3611520"/>
           </a:xfrm>
           <a:prstGeom prst="roundRect">
             <a:avLst>
@@ -14035,11 +14199,11 @@
             </a:avLst>
           </a:prstGeom>
           <a:solidFill>
-            <a:srgbClr val="2A1E1D"/>
+            <a:srgbClr val="101F2B"/>
           </a:solidFill>
           <a:ln w="12700">
             <a:solidFill>
-              <a:srgbClr val="734E37"/>
+              <a:srgbClr val="42D3E6"/>
             </a:solidFill>
             <a:round/>
           </a:ln>
@@ -14069,7 +14233,7 @@
           </a:bodyPr>
           <a:lstStyle/>
           <a:p>
-            <a:endParaRPr lang="en-US" sz="1800" b="0" u="none" strike="noStrike">
+            <a:endParaRPr lang="en-US" sz="1800" b="0" u="none" strike="noStrike" dirty="0">
               <a:solidFill>
                 <a:schemeClr val="lt1"/>
               </a:solidFill>
@@ -14082,14 +14246,73 @@
       </p:sp>
       <p:sp>
         <p:nvSpPr>
-          <p:cNvPr id="334" name="TextBox 15"/>
+          <p:cNvPr id="353" name="Rounded Rectangle 19"/>
           <p:cNvSpPr/>
           <p:nvPr/>
         </p:nvSpPr>
         <p:spPr>
           <a:xfrm>
-            <a:off x="1325880" y="5925240"/>
-            <a:ext cx="9555120" cy="200880"/>
+            <a:off x="7040880" y="2267640"/>
+            <a:ext cx="1096920" cy="292320"/>
+          </a:xfrm>
+          <a:prstGeom prst="roundRect">
+            <a:avLst>
+              <a:gd name="adj" fmla="val 16667"/>
+            </a:avLst>
+          </a:prstGeom>
+          <a:solidFill>
+            <a:srgbClr val="48E0B8"/>
+          </a:solidFill>
+          <a:ln>
+            <a:noFill/>
+          </a:ln>
+          <a:effectLst>
+            <a:outerShdw blurRad="39960" dist="23040" dir="5400000" rotWithShape="0">
+              <a:srgbClr val="000000">
+                <a:alpha val="35000"/>
+              </a:srgbClr>
+            </a:outerShdw>
+          </a:effectLst>
+        </p:spPr>
+        <p:style>
+          <a:lnRef idx="1">
+            <a:schemeClr val="accent1"/>
+          </a:lnRef>
+          <a:fillRef idx="3">
+            <a:schemeClr val="accent1"/>
+          </a:fillRef>
+          <a:effectRef idx="2">
+            <a:schemeClr val="accent1"/>
+          </a:effectRef>
+          <a:fontRef idx="minor"/>
+        </p:style>
+        <p:txBody>
+          <a:bodyPr lIns="90000" tIns="45000" rIns="90000" bIns="45000" anchor="ctr">
+            <a:noAutofit/>
+          </a:bodyPr>
+          <a:lstStyle/>
+          <a:p>
+            <a:endParaRPr lang="en-US" sz="1800" b="0" u="none" strike="noStrike">
+              <a:solidFill>
+                <a:schemeClr val="lt1"/>
+              </a:solidFill>
+              <a:effectLst/>
+              <a:uFillTx/>
+              <a:latin typeface="Calibri"/>
+            </a:endParaRPr>
+          </a:p>
+        </p:txBody>
+      </p:sp>
+      <p:sp>
+        <p:nvSpPr>
+          <p:cNvPr id="354" name="TextBox 20"/>
+          <p:cNvSpPr/>
+          <p:nvPr/>
+        </p:nvSpPr>
+        <p:spPr>
+          <a:xfrm>
+            <a:off x="7077600" y="2286000"/>
+            <a:ext cx="1023840" cy="228240"/>
           </a:xfrm>
           <a:prstGeom prst="rect">
             <a:avLst/>
@@ -14112,7 +14335,7 @@
           <a:fontRef idx="minor"/>
         </p:style>
         <p:txBody>
-          <a:bodyPr lIns="36720" tIns="36720" rIns="36720" bIns="36720" anchor="t">
+          <a:bodyPr lIns="9000" tIns="9000" rIns="9000" bIns="9000" anchor="ctr">
             <a:spAutoFit/>
           </a:bodyPr>
           <a:lstStyle/>
@@ -14126,17 +14349,723 @@
               </a:spcAft>
             </a:pPr>
             <a:r>
-              <a:rPr lang="en-US" sz="1100" b="1" u="none" strike="noStrike">
-                <a:solidFill>
-                  <a:srgbClr val="FFB55B"/>
+              <a:rPr lang="en-US" sz="900" b="1" u="none" strike="noStrike">
+                <a:solidFill>
+                  <a:srgbClr val="0A1020"/>
                 </a:solidFill>
                 <a:effectLst/>
                 <a:uFillTx/>
                 <a:latin typeface="Aptos"/>
               </a:rPr>
-              <a:t>System prompts and similarity thresholds are not security boundaries; the support prompt is not a moderation plugin.</a:t>
-            </a:r>
-            <a:endParaRPr lang="en-US" sz="1100" b="0" u="none" strike="noStrike">
+              <a:t>LIVE DEMO</a:t>
+            </a:r>
+            <a:endParaRPr lang="en-US" sz="900" b="0" u="none" strike="noStrike">
+              <a:solidFill>
+                <a:srgbClr val="FFFFFF"/>
+              </a:solidFill>
+              <a:effectLst/>
+              <a:uFillTx/>
+              <a:latin typeface="Arial"/>
+            </a:endParaRPr>
+          </a:p>
+        </p:txBody>
+      </p:sp>
+      <p:sp>
+        <p:nvSpPr>
+          <p:cNvPr id="355" name="TextBox 21"/>
+          <p:cNvSpPr/>
+          <p:nvPr/>
+        </p:nvSpPr>
+        <p:spPr>
+          <a:xfrm>
+            <a:off x="7059240" y="2788920"/>
+            <a:ext cx="3840120" cy="273960"/>
+          </a:xfrm>
+          <a:prstGeom prst="rect">
+            <a:avLst/>
+          </a:prstGeom>
+          <a:noFill/>
+          <a:ln w="0">
+            <a:noFill/>
+          </a:ln>
+        </p:spPr>
+        <p:style>
+          <a:lnRef idx="0">
+            <a:scrgbClr r="0" g="0" b="0"/>
+          </a:lnRef>
+          <a:fillRef idx="0">
+            <a:scrgbClr r="0" g="0" b="0"/>
+          </a:fillRef>
+          <a:effectRef idx="0">
+            <a:scrgbClr r="0" g="0" b="0"/>
+          </a:effectRef>
+          <a:fontRef idx="minor"/>
+        </p:style>
+        <p:txBody>
+          <a:bodyPr lIns="36720" tIns="36720" rIns="36720" bIns="36720" anchor="t">
+            <a:spAutoFit/>
+          </a:bodyPr>
+          <a:lstStyle/>
+          <a:p>
+            <a:pPr defTabSz="457200">
+              <a:lnSpc>
+                <a:spcPct val="100000"/>
+              </a:lnSpc>
+              <a:spcAft>
+                <a:spcPts val="400"/>
+              </a:spcAft>
+            </a:pPr>
+            <a:r>
+              <a:rPr lang="en-US" sz="1500" b="1" u="none" strike="noStrike">
+                <a:solidFill>
+                  <a:srgbClr val="F4F7FF"/>
+                </a:solidFill>
+                <a:effectLst/>
+                <a:uFillTx/>
+                <a:latin typeface="Aptos"/>
+              </a:rPr>
+              <a:t>1  Start the local stack</a:t>
+            </a:r>
+            <a:endParaRPr lang="en-US" sz="1500" b="0" u="none" strike="noStrike">
+              <a:solidFill>
+                <a:srgbClr val="FFFFFF"/>
+              </a:solidFill>
+              <a:effectLst/>
+              <a:uFillTx/>
+              <a:latin typeface="Arial"/>
+            </a:endParaRPr>
+          </a:p>
+        </p:txBody>
+      </p:sp>
+      <p:sp>
+        <p:nvSpPr>
+          <p:cNvPr id="356" name="TextBox 22"/>
+          <p:cNvSpPr/>
+          <p:nvPr/>
+        </p:nvSpPr>
+        <p:spPr>
+          <a:xfrm>
+            <a:off x="7242120" y="3127320"/>
+            <a:ext cx="3565800" cy="319680"/>
+          </a:xfrm>
+          <a:prstGeom prst="rect">
+            <a:avLst/>
+          </a:prstGeom>
+          <a:noFill/>
+          <a:ln w="0">
+            <a:noFill/>
+          </a:ln>
+        </p:spPr>
+        <p:style>
+          <a:lnRef idx="0">
+            <a:scrgbClr r="0" g="0" b="0"/>
+          </a:lnRef>
+          <a:fillRef idx="0">
+            <a:scrgbClr r="0" g="0" b="0"/>
+          </a:fillRef>
+          <a:effectRef idx="0">
+            <a:scrgbClr r="0" g="0" b="0"/>
+          </a:effectRef>
+          <a:fontRef idx="minor"/>
+        </p:style>
+        <p:txBody>
+          <a:bodyPr lIns="36720" tIns="36720" rIns="36720" bIns="36720" anchor="t">
+            <a:spAutoFit/>
+          </a:bodyPr>
+          <a:lstStyle/>
+          <a:p>
+            <a:pPr defTabSz="457200">
+              <a:lnSpc>
+                <a:spcPct val="100000"/>
+              </a:lnSpc>
+              <a:spcAft>
+                <a:spcPts val="400"/>
+              </a:spcAft>
+            </a:pPr>
+            <a:r>
+              <a:rPr lang="en-US" sz="1600" b="1" u="none" strike="noStrike" dirty="0">
+                <a:solidFill>
+                  <a:srgbClr val="48E0B8"/>
+                </a:solidFill>
+                <a:effectLst/>
+                <a:uFillTx/>
+                <a:latin typeface="Aptos Mono"/>
+              </a:rPr>
+              <a:t>make terraform-up</a:t>
+            </a:r>
+            <a:endParaRPr lang="en-US" sz="1600" b="0" u="none" strike="noStrike" dirty="0">
+              <a:solidFill>
+                <a:srgbClr val="FFFFFF"/>
+              </a:solidFill>
+              <a:effectLst/>
+              <a:uFillTx/>
+              <a:latin typeface="Arial"/>
+            </a:endParaRPr>
+          </a:p>
+        </p:txBody>
+      </p:sp>
+      <p:sp>
+        <p:nvSpPr>
+          <p:cNvPr id="357" name="TextBox 23"/>
+          <p:cNvSpPr/>
+          <p:nvPr/>
+        </p:nvSpPr>
+        <p:spPr>
+          <a:xfrm>
+            <a:off x="7059240" y="3657600"/>
+            <a:ext cx="3977280" cy="273960"/>
+          </a:xfrm>
+          <a:prstGeom prst="rect">
+            <a:avLst/>
+          </a:prstGeom>
+          <a:noFill/>
+          <a:ln w="0">
+            <a:noFill/>
+          </a:ln>
+        </p:spPr>
+        <p:style>
+          <a:lnRef idx="0">
+            <a:scrgbClr r="0" g="0" b="0"/>
+          </a:lnRef>
+          <a:fillRef idx="0">
+            <a:scrgbClr r="0" g="0" b="0"/>
+          </a:fillRef>
+          <a:effectRef idx="0">
+            <a:scrgbClr r="0" g="0" b="0"/>
+          </a:effectRef>
+          <a:fontRef idx="minor"/>
+        </p:style>
+        <p:txBody>
+          <a:bodyPr lIns="36720" tIns="36720" rIns="36720" bIns="36720" anchor="t">
+            <a:spAutoFit/>
+          </a:bodyPr>
+          <a:lstStyle/>
+          <a:p>
+            <a:pPr defTabSz="457200">
+              <a:lnSpc>
+                <a:spcPct val="100000"/>
+              </a:lnSpc>
+              <a:spcAft>
+                <a:spcPts val="400"/>
+              </a:spcAft>
+            </a:pPr>
+            <a:r>
+              <a:rPr lang="en-US" sz="1400" b="1" u="none" strike="noStrike">
+                <a:solidFill>
+                  <a:srgbClr val="F4F7FF"/>
+                </a:solidFill>
+                <a:effectLst/>
+                <a:uFillTx/>
+                <a:latin typeface="Aptos"/>
+              </a:rPr>
+              <a:t>2  Ask about the release checklist</a:t>
+            </a:r>
+            <a:endParaRPr lang="en-US" sz="1400" b="0" u="none" strike="noStrike">
+              <a:solidFill>
+                <a:srgbClr val="FFFFFF"/>
+              </a:solidFill>
+              <a:effectLst/>
+              <a:uFillTx/>
+              <a:latin typeface="Arial"/>
+            </a:endParaRPr>
+          </a:p>
+        </p:txBody>
+      </p:sp>
+      <p:sp>
+        <p:nvSpPr>
+          <p:cNvPr id="358" name="TextBox 24"/>
+          <p:cNvSpPr/>
+          <p:nvPr/>
+        </p:nvSpPr>
+        <p:spPr>
+          <a:xfrm>
+            <a:off x="7242120" y="4005000"/>
+            <a:ext cx="3565800" cy="273960"/>
+          </a:xfrm>
+          <a:prstGeom prst="rect">
+            <a:avLst/>
+          </a:prstGeom>
+          <a:noFill/>
+          <a:ln w="0">
+            <a:noFill/>
+          </a:ln>
+        </p:spPr>
+        <p:style>
+          <a:lnRef idx="0">
+            <a:scrgbClr r="0" g="0" b="0"/>
+          </a:lnRef>
+          <a:fillRef idx="0">
+            <a:scrgbClr r="0" g="0" b="0"/>
+          </a:fillRef>
+          <a:effectRef idx="0">
+            <a:scrgbClr r="0" g="0" b="0"/>
+          </a:effectRef>
+          <a:fontRef idx="minor"/>
+        </p:style>
+        <p:txBody>
+          <a:bodyPr lIns="36720" tIns="36720" rIns="36720" bIns="36720" anchor="t">
+            <a:spAutoFit/>
+          </a:bodyPr>
+          <a:lstStyle/>
+          <a:p>
+            <a:pPr defTabSz="457200">
+              <a:lnSpc>
+                <a:spcPct val="100000"/>
+              </a:lnSpc>
+              <a:spcAft>
+                <a:spcPts val="400"/>
+              </a:spcAft>
+            </a:pPr>
+            <a:r>
+              <a:rPr lang="en-US" sz="1400" b="1" u="none" strike="noStrike">
+                <a:solidFill>
+                  <a:srgbClr val="42D3E6"/>
+                </a:solidFill>
+                <a:effectLst/>
+                <a:uFillTx/>
+                <a:latin typeface="Aptos Mono"/>
+              </a:rPr>
+              <a:t>POST /api/rag/chat</a:t>
+            </a:r>
+            <a:endParaRPr lang="en-US" sz="1400" b="0" u="none" strike="noStrike">
+              <a:solidFill>
+                <a:srgbClr val="FFFFFF"/>
+              </a:solidFill>
+              <a:effectLst/>
+              <a:uFillTx/>
+              <a:latin typeface="Arial"/>
+            </a:endParaRPr>
+          </a:p>
+        </p:txBody>
+      </p:sp>
+      <p:sp>
+        <p:nvSpPr>
+          <p:cNvPr id="359" name="TextBox 25"/>
+          <p:cNvSpPr/>
+          <p:nvPr/>
+        </p:nvSpPr>
+        <p:spPr>
+          <a:xfrm>
+            <a:off x="7059240" y="4480560"/>
+            <a:ext cx="3931560" cy="273960"/>
+          </a:xfrm>
+          <a:prstGeom prst="rect">
+            <a:avLst/>
+          </a:prstGeom>
+          <a:noFill/>
+          <a:ln w="0">
+            <a:noFill/>
+          </a:ln>
+        </p:spPr>
+        <p:style>
+          <a:lnRef idx="0">
+            <a:scrgbClr r="0" g="0" b="0"/>
+          </a:lnRef>
+          <a:fillRef idx="0">
+            <a:scrgbClr r="0" g="0" b="0"/>
+          </a:fillRef>
+          <a:effectRef idx="0">
+            <a:scrgbClr r="0" g="0" b="0"/>
+          </a:effectRef>
+          <a:fontRef idx="minor"/>
+        </p:style>
+        <p:txBody>
+          <a:bodyPr lIns="36720" tIns="36720" rIns="36720" bIns="36720" anchor="t">
+            <a:spAutoFit/>
+          </a:bodyPr>
+          <a:lstStyle/>
+          <a:p>
+            <a:pPr defTabSz="457200">
+              <a:lnSpc>
+                <a:spcPct val="100000"/>
+              </a:lnSpc>
+              <a:spcAft>
+                <a:spcPts val="400"/>
+              </a:spcAft>
+            </a:pPr>
+            <a:r>
+              <a:rPr lang="en-US" sz="1400" b="1" u="none" strike="noStrike">
+                <a:solidFill>
+                  <a:srgbClr val="F4F7FF"/>
+                </a:solidFill>
+                <a:effectLst/>
+                <a:uFillTx/>
+                <a:latin typeface="Aptos"/>
+              </a:rPr>
+              <a:t>3  Contrast local vs. Konnect</a:t>
+            </a:r>
+            <a:endParaRPr lang="en-US" sz="1400" b="0" u="none" strike="noStrike">
+              <a:solidFill>
+                <a:srgbClr val="FFFFFF"/>
+              </a:solidFill>
+              <a:effectLst/>
+              <a:uFillTx/>
+              <a:latin typeface="Arial"/>
+            </a:endParaRPr>
+          </a:p>
+        </p:txBody>
+      </p:sp>
+      <p:sp>
+        <p:nvSpPr>
+          <p:cNvPr id="360" name="TextBox 26"/>
+          <p:cNvSpPr/>
+          <p:nvPr/>
+        </p:nvSpPr>
+        <p:spPr>
+          <a:xfrm>
+            <a:off x="7242120" y="4892040"/>
+            <a:ext cx="3885840" cy="438480"/>
+          </a:xfrm>
+          <a:prstGeom prst="rect">
+            <a:avLst/>
+          </a:prstGeom>
+          <a:noFill/>
+          <a:ln w="0">
+            <a:noFill/>
+          </a:ln>
+        </p:spPr>
+        <p:style>
+          <a:lnRef idx="0">
+            <a:scrgbClr r="0" g="0" b="0"/>
+          </a:lnRef>
+          <a:fillRef idx="0">
+            <a:scrgbClr r="0" g="0" b="0"/>
+          </a:fillRef>
+          <a:effectRef idx="0">
+            <a:scrgbClr r="0" g="0" b="0"/>
+          </a:effectRef>
+          <a:fontRef idx="minor"/>
+        </p:style>
+        <p:txBody>
+          <a:bodyPr lIns="36720" tIns="36720" rIns="36720" bIns="36720" anchor="t">
+            <a:spAutoFit/>
+          </a:bodyPr>
+          <a:lstStyle/>
+          <a:p>
+            <a:pPr defTabSz="457200">
+              <a:lnSpc>
+                <a:spcPct val="100000"/>
+              </a:lnSpc>
+              <a:spcAft>
+                <a:spcPts val="400"/>
+              </a:spcAft>
+            </a:pPr>
+            <a:r>
+              <a:rPr lang="en-US" sz="1000" b="0" u="none" strike="noStrike">
+                <a:solidFill>
+                  <a:srgbClr val="AEBBD3"/>
+                </a:solidFill>
+                <a:effectLst/>
+                <a:uFillTx/>
+                <a:latin typeface="Aptos Mono"/>
+              </a:rPr>
+              <a:t>{"message":"What is the project release checklist?"}</a:t>
+            </a:r>
+            <a:endParaRPr lang="en-US" sz="1000" b="0" u="none" strike="noStrike">
+              <a:solidFill>
+                <a:srgbClr val="FFFFFF"/>
+              </a:solidFill>
+              <a:effectLst/>
+              <a:uFillTx/>
+              <a:latin typeface="Arial"/>
+            </a:endParaRPr>
+          </a:p>
+        </p:txBody>
+      </p:sp>
+      <p:sp>
+        <p:nvSpPr>
+          <p:cNvPr id="361" name="TextBox 27"/>
+          <p:cNvSpPr/>
+          <p:nvPr/>
+        </p:nvSpPr>
+        <p:spPr>
+          <a:xfrm>
+            <a:off x="777240" y="5961960"/>
+            <a:ext cx="10698120" cy="383760"/>
+          </a:xfrm>
+          <a:prstGeom prst="rect">
+            <a:avLst/>
+          </a:prstGeom>
+          <a:noFill/>
+          <a:ln w="0">
+            <a:gradFill>
+              <a:gsLst>
+                <a:gs pos="0">
+                  <a:schemeClr val="accent1">
+                    <a:lumMod val="5000"/>
+                    <a:lumOff val="95000"/>
+                  </a:schemeClr>
+                </a:gs>
+                <a:gs pos="74000">
+                  <a:schemeClr val="accent1">
+                    <a:lumMod val="45000"/>
+                    <a:lumOff val="55000"/>
+                  </a:schemeClr>
+                </a:gs>
+                <a:gs pos="83000">
+                  <a:schemeClr val="accent1">
+                    <a:lumMod val="45000"/>
+                    <a:lumOff val="55000"/>
+                  </a:schemeClr>
+                </a:gs>
+                <a:gs pos="100000">
+                  <a:schemeClr val="accent1">
+                    <a:lumMod val="30000"/>
+                    <a:lumOff val="70000"/>
+                  </a:schemeClr>
+                </a:gs>
+              </a:gsLst>
+              <a:lin ang="5400000" scaled="1"/>
+            </a:gradFill>
+          </a:ln>
+        </p:spPr>
+        <p:style>
+          <a:lnRef idx="0">
+            <a:scrgbClr r="0" g="0" b="0"/>
+          </a:lnRef>
+          <a:fillRef idx="0">
+            <a:scrgbClr r="0" g="0" b="0"/>
+          </a:fillRef>
+          <a:effectRef idx="0">
+            <a:scrgbClr r="0" g="0" b="0"/>
+          </a:effectRef>
+          <a:fontRef idx="minor"/>
+        </p:style>
+        <p:txBody>
+          <a:bodyPr lIns="36720" tIns="36720" rIns="36720" bIns="36720" anchor="t">
+            <a:spAutoFit/>
+          </a:bodyPr>
+          <a:lstStyle/>
+          <a:p>
+            <a:pPr algn="ctr" defTabSz="457200">
+              <a:lnSpc>
+                <a:spcPct val="100000"/>
+              </a:lnSpc>
+              <a:spcAft>
+                <a:spcPts val="400"/>
+              </a:spcAft>
+            </a:pPr>
+            <a:r>
+              <a:rPr lang="en-US" sz="900" b="0" u="none" strike="noStrike" dirty="0">
+                <a:solidFill>
+                  <a:srgbClr val="AEBBD3"/>
+                </a:solidFill>
+                <a:effectLst/>
+                <a:uFillTx/>
+                <a:latin typeface="Aptos"/>
+              </a:rPr>
+              <a:t>Project references: </a:t>
+            </a:r>
+            <a:r>
+              <a:rPr lang="en-US" sz="900" b="0" u="none" strike="noStrike" dirty="0" err="1">
+                <a:solidFill>
+                  <a:srgbClr val="AEBBD3"/>
+                </a:solidFill>
+                <a:effectLst/>
+                <a:uFillTx/>
+                <a:latin typeface="Aptos"/>
+              </a:rPr>
+              <a:t>README.md</a:t>
+            </a:r>
+            <a:r>
+              <a:rPr lang="en-US" sz="900" b="0" u="none" strike="noStrike" dirty="0">
+                <a:solidFill>
+                  <a:srgbClr val="AEBBD3"/>
+                </a:solidFill>
+                <a:effectLst/>
+                <a:uFillTx/>
+                <a:latin typeface="Aptos"/>
+              </a:rPr>
+              <a:t> • knowledge/local-</a:t>
+            </a:r>
+            <a:r>
+              <a:rPr lang="en-US" sz="900" b="0" u="none" strike="noStrike" dirty="0" err="1">
+                <a:solidFill>
+                  <a:srgbClr val="AEBBD3"/>
+                </a:solidFill>
+                <a:effectLst/>
+                <a:uFillTx/>
+                <a:latin typeface="Aptos"/>
+              </a:rPr>
+              <a:t>mode.md</a:t>
+            </a:r>
+            <a:r>
+              <a:rPr lang="en-US" sz="900" b="0" u="none" strike="noStrike" dirty="0">
+                <a:solidFill>
+                  <a:srgbClr val="AEBBD3"/>
+                </a:solidFill>
+                <a:effectLst/>
+                <a:uFillTx/>
+                <a:latin typeface="Aptos"/>
+              </a:rPr>
+              <a:t> • </a:t>
+            </a:r>
+            <a:r>
+              <a:rPr lang="en-US" sz="900" b="0" u="none" strike="noStrike" dirty="0" err="1">
+                <a:solidFill>
+                  <a:srgbClr val="AEBBD3"/>
+                </a:solidFill>
+                <a:effectLst/>
+                <a:uFillTx/>
+                <a:latin typeface="Aptos"/>
+              </a:rPr>
+              <a:t>src</a:t>
+            </a:r>
+            <a:r>
+              <a:rPr lang="en-US" sz="900" b="0" u="none" strike="noStrike" dirty="0">
+                <a:solidFill>
+                  <a:srgbClr val="AEBBD3"/>
+                </a:solidFill>
+                <a:effectLst/>
+                <a:uFillTx/>
+                <a:latin typeface="Aptos"/>
+              </a:rPr>
+              <a:t>/main/</a:t>
+            </a:r>
+            <a:r>
+              <a:rPr lang="en-US" sz="900" b="0" u="none" strike="noStrike" dirty="0" err="1">
+                <a:solidFill>
+                  <a:srgbClr val="AEBBD3"/>
+                </a:solidFill>
+                <a:effectLst/>
+                <a:uFillTx/>
+                <a:latin typeface="Aptos"/>
+              </a:rPr>
+              <a:t>kotlin</a:t>
+            </a:r>
+            <a:r>
+              <a:rPr lang="en-US" sz="900" b="0" u="none" strike="noStrike" dirty="0">
+                <a:solidFill>
+                  <a:srgbClr val="AEBBD3"/>
+                </a:solidFill>
+                <a:effectLst/>
+                <a:uFillTx/>
+                <a:latin typeface="Aptos"/>
+              </a:rPr>
+              <a:t>/org/</a:t>
+            </a:r>
+            <a:r>
+              <a:rPr lang="en-US" sz="900" b="0" u="none" strike="noStrike" dirty="0" err="1">
+                <a:solidFill>
+                  <a:srgbClr val="AEBBD3"/>
+                </a:solidFill>
+                <a:effectLst/>
+                <a:uFillTx/>
+                <a:latin typeface="Aptos"/>
+              </a:rPr>
+              <a:t>jesperancinha</a:t>
+            </a:r>
+            <a:r>
+              <a:rPr lang="en-US" sz="900" b="0" u="none" strike="noStrike" dirty="0">
+                <a:solidFill>
+                  <a:srgbClr val="AEBBD3"/>
+                </a:solidFill>
+                <a:effectLst/>
+                <a:uFillTx/>
+                <a:latin typeface="Aptos"/>
+              </a:rPr>
+              <a:t>/</a:t>
+            </a:r>
+            <a:r>
+              <a:rPr lang="en-US" sz="900" b="0" u="none" strike="noStrike" dirty="0" err="1">
+                <a:solidFill>
+                  <a:srgbClr val="AEBBD3"/>
+                </a:solidFill>
+                <a:effectLst/>
+                <a:uFillTx/>
+                <a:latin typeface="Aptos"/>
+              </a:rPr>
+              <a:t>kong</a:t>
+            </a:r>
+            <a:r>
+              <a:rPr lang="en-US" sz="900" b="0" u="none" strike="noStrike" dirty="0">
+                <a:solidFill>
+                  <a:srgbClr val="AEBBD3"/>
+                </a:solidFill>
+                <a:effectLst/>
+                <a:uFillTx/>
+                <a:latin typeface="Aptos"/>
+              </a:rPr>
+              <a:t>/chatbot/ • compose*.</a:t>
+            </a:r>
+            <a:r>
+              <a:rPr lang="en-US" sz="900" b="0" u="none" strike="noStrike" dirty="0" err="1">
+                <a:solidFill>
+                  <a:srgbClr val="AEBBD3"/>
+                </a:solidFill>
+                <a:effectLst/>
+                <a:uFillTx/>
+                <a:latin typeface="Aptos"/>
+              </a:rPr>
+              <a:t>yaml</a:t>
+            </a:r>
+            <a:r>
+              <a:rPr lang="en-US" sz="900" b="0" u="none" strike="noStrike" dirty="0">
+                <a:solidFill>
+                  <a:srgbClr val="AEBBD3"/>
+                </a:solidFill>
+                <a:effectLst/>
+                <a:uFillTx/>
+                <a:latin typeface="Aptos"/>
+              </a:rPr>
+              <a:t> • </a:t>
+            </a:r>
+            <a:r>
+              <a:rPr lang="en-US" sz="900" b="0" u="none" strike="noStrike" dirty="0" err="1">
+                <a:solidFill>
+                  <a:srgbClr val="AEBBD3"/>
+                </a:solidFill>
+                <a:effectLst/>
+                <a:uFillTx/>
+                <a:latin typeface="Aptos"/>
+              </a:rPr>
+              <a:t>kong</a:t>
+            </a:r>
+            <a:r>
+              <a:rPr lang="en-US" sz="900" b="0" u="none" strike="noStrike" dirty="0">
+                <a:solidFill>
+                  <a:srgbClr val="AEBBD3"/>
+                </a:solidFill>
+                <a:effectLst/>
+                <a:uFillTx/>
+                <a:latin typeface="Aptos"/>
+              </a:rPr>
+              <a:t>/</a:t>
+            </a:r>
+            <a:r>
+              <a:rPr lang="en-US" sz="900" b="0" u="none" strike="noStrike" dirty="0" err="1">
+                <a:solidFill>
+                  <a:srgbClr val="AEBBD3"/>
+                </a:solidFill>
+                <a:effectLst/>
+                <a:uFillTx/>
+                <a:latin typeface="Aptos"/>
+              </a:rPr>
+              <a:t>local.yaml</a:t>
+            </a:r>
+            <a:r>
+              <a:rPr lang="en-US" sz="900" b="0" u="none" strike="noStrike" dirty="0">
+                <a:solidFill>
+                  <a:srgbClr val="AEBBD3"/>
+                </a:solidFill>
+                <a:effectLst/>
+                <a:uFillTx/>
+                <a:latin typeface="Aptos"/>
+              </a:rPr>
+              <a:t> • terraform/ • scripts/configure-</a:t>
+            </a:r>
+            <a:r>
+              <a:rPr lang="en-US" sz="900" b="0" u="none" strike="noStrike" dirty="0" err="1">
+                <a:solidFill>
+                  <a:srgbClr val="AEBBD3"/>
+                </a:solidFill>
+                <a:effectLst/>
+                <a:uFillTx/>
+                <a:latin typeface="Aptos"/>
+              </a:rPr>
+              <a:t>konnect.sh</a:t>
+            </a:r>
+            <a:endParaRPr lang="en-US" sz="900" b="0" u="none" strike="noStrike" dirty="0">
               <a:solidFill>
                 <a:srgbClr val="FFFFFF"/>
               </a:solidFill>
@@ -14182,14 +15111,14 @@
       </p:grpSpPr>
       <p:sp>
         <p:nvSpPr>
-          <p:cNvPr id="335" name="TextBox 1"/>
+          <p:cNvPr id="320" name="TextBox 1"/>
           <p:cNvSpPr/>
           <p:nvPr/>
         </p:nvSpPr>
         <p:spPr>
           <a:xfrm>
             <a:off x="567000" y="320040"/>
-            <a:ext cx="4937400" cy="255600"/>
+            <a:ext cx="4937400" cy="228045"/>
           </a:xfrm>
           <a:prstGeom prst="rect">
             <a:avLst/>
@@ -14226,17 +15155,35 @@
               </a:spcAft>
             </a:pPr>
             <a:r>
-              <a:rPr lang="en-US" sz="1000" b="1" u="none" strike="noStrike">
+              <a:rPr lang="en-US" sz="1000" b="1" dirty="0">
                 <a:solidFill>
                   <a:srgbClr val="42D3E6"/>
                 </a:solidFill>
-                <a:effectLst/>
-                <a:uFillTx/>
                 <a:latin typeface="Aptos"/>
               </a:rPr>
-              <a:t>10 • WRAP-UP</a:t>
-            </a:r>
-            <a:endParaRPr lang="en-US" sz="1000" b="0" u="none" strike="noStrike">
+              <a:t>10</a:t>
+            </a:r>
+            <a:r>
+              <a:rPr lang="en-US" sz="1000" b="1" u="none" strike="noStrike" dirty="0">
+                <a:solidFill>
+                  <a:srgbClr val="42D3E6"/>
+                </a:solidFill>
+                <a:effectLst/>
+                <a:uFillTx/>
+                <a:latin typeface="Aptos"/>
+              </a:rPr>
+              <a:t> • </a:t>
+            </a:r>
+            <a:r>
+              <a:rPr lang="en-US" sz="1000" b="1" dirty="0" err="1">
+                <a:solidFill>
+                  <a:srgbClr val="42D3E6"/>
+                </a:solidFill>
+                <a:latin typeface="Aptos"/>
+              </a:rPr>
+              <a:t>Tradoffs</a:t>
+            </a:r>
+            <a:endParaRPr lang="en-US" sz="1000" b="0" u="none" strike="noStrike" dirty="0">
               <a:solidFill>
                 <a:srgbClr val="FFFFFF"/>
               </a:solidFill>
@@ -14249,7 +15196,7 @@
       </p:sp>
       <p:sp>
         <p:nvSpPr>
-          <p:cNvPr id="336" name="TextBox 2"/>
+          <p:cNvPr id="321" name="TextBox 2"/>
           <p:cNvSpPr/>
           <p:nvPr/>
         </p:nvSpPr>
@@ -14293,7 +15240,7 @@
               </a:spcAft>
             </a:pPr>
             <a:r>
-              <a:rPr lang="en-US" sz="2700" b="1" u="none" strike="noStrike">
+              <a:rPr lang="en-US" sz="2700" b="1" u="none" strike="noStrike" dirty="0">
                 <a:solidFill>
                   <a:srgbClr val="F4F7FF"/>
                 </a:solidFill>
@@ -14301,9 +15248,9 @@
                 <a:uFillTx/>
                 <a:latin typeface="Aptos"/>
               </a:rPr>
-              <a:t>Takeaways and a practical walkthrough</a:t>
-            </a:r>
-            <a:endParaRPr lang="en-US" sz="2700" b="0" u="none" strike="noStrike">
+              <a:t>Why use a RAG bot</a:t>
+            </a:r>
+            <a:endParaRPr lang="en-US" sz="2700" b="0" u="none" strike="noStrike" dirty="0">
               <a:solidFill>
                 <a:srgbClr val="FFFFFF"/>
               </a:solidFill>
@@ -14316,7 +15263,7 @@
       </p:sp>
       <p:sp>
         <p:nvSpPr>
-          <p:cNvPr id="337" name="TextBox 3"/>
+          <p:cNvPr id="322" name="TextBox 3"/>
           <p:cNvSpPr/>
           <p:nvPr/>
         </p:nvSpPr>
@@ -14360,7 +15307,7 @@
               </a:spcAft>
             </a:pPr>
             <a:r>
-              <a:rPr lang="en-US" sz="1200" b="0" u="none" strike="noStrike">
+              <a:rPr lang="en-US" sz="1200" b="0" u="none" strike="noStrike" dirty="0">
                 <a:solidFill>
                   <a:srgbClr val="AEBBD3"/>
                 </a:solidFill>
@@ -14368,9 +15315,9 @@
                 <a:uFillTx/>
                 <a:latin typeface="Aptos"/>
               </a:rPr>
-              <a:t>Keep the client API consistent while making retrieval and model connectivity selectable.</a:t>
-            </a:r>
-            <a:endParaRPr lang="en-US" sz="1200" b="0" u="none" strike="noStrike">
+              <a:t>A successful smoke test proves a path works — not that it is production-secure.</a:t>
+            </a:r>
+            <a:endParaRPr lang="en-US" sz="1200" b="0" u="none" strike="noStrike" dirty="0">
               <a:solidFill>
                 <a:srgbClr val="FFFFFF"/>
               </a:solidFill>
@@ -14383,7 +15330,7 @@
       </p:sp>
       <p:sp>
         <p:nvSpPr>
-          <p:cNvPr id="338" name="Rectangle 4"/>
+          <p:cNvPr id="323" name="Rectangle 4"/>
           <p:cNvSpPr/>
           <p:nvPr/>
         </p:nvSpPr>
@@ -14440,7 +15387,7 @@
       </p:sp>
       <p:sp>
         <p:nvSpPr>
-          <p:cNvPr id="339" name="TextBox 5"/>
+          <p:cNvPr id="324" name="TextBox 5"/>
           <p:cNvSpPr/>
           <p:nvPr/>
         </p:nvSpPr>
@@ -14492,7 +15439,7 @@
                 <a:uFillTx/>
                 <a:latin typeface="Aptos"/>
               </a:rPr>
-              <a:t>KONG CHATBOT ARCHITECTURE   •   10 / 10</a:t>
+              <a:t>KONG CHATBOT ARCHITECTURE   •   09 / 10</a:t>
             </a:r>
             <a:endParaRPr lang="en-US" sz="800" b="0" u="none" strike="noStrike">
               <a:solidFill>
@@ -14507,27 +15454,53 @@
       </p:sp>
       <p:sp>
         <p:nvSpPr>
-          <p:cNvPr id="340" name="Rounded Rectangle 6"/>
+          <p:cNvPr id="325" name="Rounded Rectangle 6"/>
           <p:cNvSpPr/>
           <p:nvPr/>
         </p:nvSpPr>
         <p:spPr>
           <a:xfrm>
-            <a:off x="685800" y="1965960"/>
-            <a:ext cx="5623200" cy="566640"/>
+            <a:off x="625200" y="1993320"/>
+            <a:ext cx="5348880" cy="3611520"/>
           </a:xfrm>
           <a:prstGeom prst="roundRect">
             <a:avLst>
-              <a:gd name="adj" fmla="val 16667"/>
+              <a:gd name="adj" fmla="val 5050"/>
             </a:avLst>
           </a:prstGeom>
           <a:solidFill>
             <a:srgbClr val="141D33"/>
           </a:solidFill>
           <a:ln w="12700">
-            <a:solidFill>
-              <a:srgbClr val="1A2641"/>
-            </a:solidFill>
+            <a:gradFill>
+              <a:gsLst>
+                <a:gs pos="0">
+                  <a:schemeClr val="accent1">
+                    <a:lumMod val="5000"/>
+                    <a:lumOff val="95000"/>
+                  </a:schemeClr>
+                </a:gs>
+                <a:gs pos="74000">
+                  <a:schemeClr val="accent1">
+                    <a:lumMod val="45000"/>
+                    <a:lumOff val="55000"/>
+                  </a:schemeClr>
+                </a:gs>
+                <a:gs pos="83000">
+                  <a:schemeClr val="accent1">
+                    <a:lumMod val="45000"/>
+                    <a:lumOff val="55000"/>
+                  </a:schemeClr>
+                </a:gs>
+                <a:gs pos="100000">
+                  <a:schemeClr val="accent1">
+                    <a:lumMod val="30000"/>
+                    <a:lumOff val="70000"/>
+                  </a:schemeClr>
+                </a:gs>
+              </a:gsLst>
+              <a:lin ang="5400000" scaled="1"/>
+            </a:gradFill>
             <a:round/>
           </a:ln>
           <a:effectLst>
@@ -14556,7 +15529,7 @@
           </a:bodyPr>
           <a:lstStyle/>
           <a:p>
-            <a:endParaRPr lang="en-US" sz="1800" b="0" u="none" strike="noStrike">
+            <a:endParaRPr lang="en-US" sz="1800" b="0" u="none" strike="noStrike" dirty="0">
               <a:solidFill>
                 <a:schemeClr val="lt1"/>
               </a:solidFill>
@@ -14569,148 +15542,14 @@
       </p:sp>
       <p:sp>
         <p:nvSpPr>
-          <p:cNvPr id="341" name="TextBox 7"/>
+          <p:cNvPr id="326" name="Rounded Rectangle 7"/>
           <p:cNvSpPr/>
           <p:nvPr/>
         </p:nvSpPr>
         <p:spPr>
           <a:xfrm>
-            <a:off x="914400" y="2103120"/>
-            <a:ext cx="1691280" cy="219240"/>
-          </a:xfrm>
-          <a:prstGeom prst="rect">
-            <a:avLst/>
-          </a:prstGeom>
-          <a:noFill/>
-          <a:ln w="0">
-            <a:noFill/>
-          </a:ln>
-        </p:spPr>
-        <p:style>
-          <a:lnRef idx="0">
-            <a:scrgbClr r="0" g="0" b="0"/>
-          </a:lnRef>
-          <a:fillRef idx="0">
-            <a:scrgbClr r="0" g="0" b="0"/>
-          </a:fillRef>
-          <a:effectRef idx="0">
-            <a:scrgbClr r="0" g="0" b="0"/>
-          </a:effectRef>
-          <a:fontRef idx="minor"/>
-        </p:style>
-        <p:txBody>
-          <a:bodyPr lIns="36720" tIns="36720" rIns="36720" bIns="36720" anchor="t">
-            <a:spAutoFit/>
-          </a:bodyPr>
-          <a:lstStyle/>
-          <a:p>
-            <a:pPr defTabSz="457200">
-              <a:lnSpc>
-                <a:spcPct val="100000"/>
-              </a:lnSpc>
-              <a:spcAft>
-                <a:spcPts val="400"/>
-              </a:spcAft>
-            </a:pPr>
-            <a:r>
-              <a:rPr lang="en-US" sz="1300" b="1" u="none" strike="noStrike">
-                <a:solidFill>
-                  <a:srgbClr val="42D3E6"/>
-                </a:solidFill>
-                <a:effectLst/>
-                <a:uFillTx/>
-                <a:latin typeface="Aptos"/>
-              </a:rPr>
-              <a:t>RAG</a:t>
-            </a:r>
-            <a:endParaRPr lang="en-US" sz="1300" b="0" u="none" strike="noStrike">
-              <a:solidFill>
-                <a:srgbClr val="FFFFFF"/>
-              </a:solidFill>
-              <a:effectLst/>
-              <a:uFillTx/>
-              <a:latin typeface="Arial"/>
-            </a:endParaRPr>
-          </a:p>
-        </p:txBody>
-      </p:sp>
-      <p:sp>
-        <p:nvSpPr>
-          <p:cNvPr id="342" name="TextBox 8"/>
-          <p:cNvSpPr/>
-          <p:nvPr/>
-        </p:nvSpPr>
-        <p:spPr>
-          <a:xfrm>
-            <a:off x="2560320" y="2066400"/>
-            <a:ext cx="3474360" cy="356400"/>
-          </a:xfrm>
-          <a:prstGeom prst="rect">
-            <a:avLst/>
-          </a:prstGeom>
-          <a:noFill/>
-          <a:ln w="0">
-            <a:noFill/>
-          </a:ln>
-        </p:spPr>
-        <p:style>
-          <a:lnRef idx="0">
-            <a:scrgbClr r="0" g="0" b="0"/>
-          </a:lnRef>
-          <a:fillRef idx="0">
-            <a:scrgbClr r="0" g="0" b="0"/>
-          </a:fillRef>
-          <a:effectRef idx="0">
-            <a:scrgbClr r="0" g="0" b="0"/>
-          </a:effectRef>
-          <a:fontRef idx="minor"/>
-        </p:style>
-        <p:txBody>
-          <a:bodyPr lIns="36720" tIns="36720" rIns="36720" bIns="36720" anchor="t">
-            <a:spAutoFit/>
-          </a:bodyPr>
-          <a:lstStyle/>
-          <a:p>
-            <a:pPr defTabSz="457200">
-              <a:lnSpc>
-                <a:spcPct val="100000"/>
-              </a:lnSpc>
-              <a:spcAft>
-                <a:spcPts val="400"/>
-              </a:spcAft>
-            </a:pPr>
-            <a:r>
-              <a:rPr lang="en-US" sz="1100" b="0" u="none" strike="noStrike">
-                <a:solidFill>
-                  <a:srgbClr val="F4F7FF"/>
-                </a:solidFill>
-                <a:effectLst/>
-                <a:uFillTx/>
-                <a:latin typeface="Aptos"/>
-              </a:rPr>
-              <a:t>supplies project knowledge and makes source-grounded answers easier to trace.</a:t>
-            </a:r>
-            <a:endParaRPr lang="en-US" sz="1100" b="0" u="none" strike="noStrike">
-              <a:solidFill>
-                <a:srgbClr val="FFFFFF"/>
-              </a:solidFill>
-              <a:effectLst/>
-              <a:uFillTx/>
-              <a:latin typeface="Arial"/>
-            </a:endParaRPr>
-          </a:p>
-        </p:txBody>
-      </p:sp>
-      <p:sp>
-        <p:nvSpPr>
-          <p:cNvPr id="343" name="Rounded Rectangle 9"/>
-          <p:cNvSpPr/>
-          <p:nvPr/>
-        </p:nvSpPr>
-        <p:spPr>
-          <a:xfrm>
-            <a:off x="685800" y="2679120"/>
-            <a:ext cx="5623200" cy="566640"/>
+            <a:off x="914400" y="2286000"/>
+            <a:ext cx="1737000" cy="292320"/>
           </a:xfrm>
           <a:prstGeom prst="roundRect">
             <a:avLst>
@@ -14718,13 +15557,10 @@
             </a:avLst>
           </a:prstGeom>
           <a:solidFill>
-            <a:srgbClr val="141D33"/>
+            <a:srgbClr val="48E0B8"/>
           </a:solidFill>
-          <a:ln w="12700">
-            <a:solidFill>
-              <a:srgbClr val="1A2641"/>
-            </a:solidFill>
-            <a:round/>
+          <a:ln>
+            <a:noFill/>
           </a:ln>
           <a:effectLst>
             <a:outerShdw blurRad="39960" dist="23040" dir="5400000" rotWithShape="0">
@@ -14765,14 +15601,14 @@
       </p:sp>
       <p:sp>
         <p:nvSpPr>
-          <p:cNvPr id="344" name="TextBox 10"/>
+          <p:cNvPr id="327" name="TextBox 8"/>
           <p:cNvSpPr/>
           <p:nvPr/>
         </p:nvSpPr>
         <p:spPr>
           <a:xfrm>
-            <a:off x="914400" y="2816280"/>
-            <a:ext cx="1691280" cy="219240"/>
+            <a:off x="951120" y="2340142"/>
+            <a:ext cx="1663920" cy="156675"/>
           </a:xfrm>
           <a:prstGeom prst="rect">
             <a:avLst/>
@@ -14795,12 +15631,12 @@
           <a:fontRef idx="minor"/>
         </p:style>
         <p:txBody>
-          <a:bodyPr lIns="36720" tIns="36720" rIns="36720" bIns="36720" anchor="t">
+          <a:bodyPr lIns="9000" tIns="9000" rIns="9000" bIns="9000" anchor="ctr">
             <a:spAutoFit/>
           </a:bodyPr>
           <a:lstStyle/>
           <a:p>
-            <a:pPr defTabSz="457200">
+            <a:pPr algn="ctr" defTabSz="457200">
               <a:lnSpc>
                 <a:spcPct val="100000"/>
               </a:lnSpc>
@@ -14809,17 +15645,17 @@
               </a:spcAft>
             </a:pPr>
             <a:r>
-              <a:rPr lang="en-US" sz="1300" b="1" u="none" strike="noStrike">
-                <a:solidFill>
-                  <a:srgbClr val="A07DFF"/>
+              <a:rPr lang="en-US" sz="900" b="1" u="none" strike="noStrike" dirty="0">
+                <a:solidFill>
+                  <a:srgbClr val="0A1020"/>
                 </a:solidFill>
                 <a:effectLst/>
                 <a:uFillTx/>
                 <a:latin typeface="Aptos"/>
               </a:rPr>
-              <a:t>Kong Gateway</a:t>
-            </a:r>
-            <a:endParaRPr lang="en-US" sz="1300" b="0" u="none" strike="noStrike">
+              <a:t>Advantages</a:t>
+            </a:r>
+            <a:endParaRPr lang="en-US" sz="900" b="0" u="none" strike="noStrike" dirty="0">
               <a:solidFill>
                 <a:srgbClr val="FFFFFF"/>
               </a:solidFill>
@@ -14832,14 +15668,14 @@
       </p:sp>
       <p:sp>
         <p:nvSpPr>
-          <p:cNvPr id="345" name="TextBox 11"/>
+          <p:cNvPr id="328" name="TextBox 9"/>
           <p:cNvSpPr/>
           <p:nvPr/>
         </p:nvSpPr>
         <p:spPr>
           <a:xfrm>
-            <a:off x="2560320" y="2779920"/>
-            <a:ext cx="3474360" cy="356400"/>
+            <a:off x="914400" y="2788920"/>
+            <a:ext cx="4708800" cy="2732910"/>
           </a:xfrm>
           <a:prstGeom prst="rect">
             <a:avLst/>
@@ -14862,7 +15698,7 @@
           <a:fontRef idx="minor"/>
         </p:style>
         <p:txBody>
-          <a:bodyPr lIns="36720" tIns="36720" rIns="36720" bIns="36720" anchor="t">
+          <a:bodyPr lIns="45720" tIns="27360" rIns="45720" bIns="27360" anchor="t">
             <a:spAutoFit/>
           </a:bodyPr>
           <a:lstStyle/>
@@ -14872,21 +15708,95 @@
                 <a:spcPct val="100000"/>
               </a:lnSpc>
               <a:spcAft>
-                <a:spcPts val="400"/>
+                <a:spcPts val="901"/>
               </a:spcAft>
             </a:pPr>
             <a:r>
-              <a:rPr lang="en-US" sz="1100" b="0" u="none" strike="noStrike">
-                <a:solidFill>
-                  <a:srgbClr val="F4F7FF"/>
-                </a:solidFill>
-                <a:effectLst/>
-                <a:uFillTx/>
-                <a:latin typeface="Aptos"/>
-              </a:rPr>
-              <a:t>is the shared traffic boundary; Konnect adds centrally managed AI Gateway plugins.</a:t>
-            </a:r>
-            <a:endParaRPr lang="en-US" sz="1100" b="0" u="none" strike="noStrike">
+              <a:rPr lang="en-US" sz="1200" dirty="0">
+                <a:solidFill>
+                  <a:srgbClr val="FFFFFF"/>
+                </a:solidFill>
+                <a:latin typeface="Arial"/>
+              </a:rPr>
+              <a:t>• More relevant answers: the model can use company-specific information instead of relying only on general training.</a:t>
+            </a:r>
+          </a:p>
+          <a:p>
+            <a:pPr defTabSz="457200">
+              <a:lnSpc>
+                <a:spcPct val="100000"/>
+              </a:lnSpc>
+              <a:spcAft>
+                <a:spcPts val="901"/>
+              </a:spcAft>
+            </a:pPr>
+            <a:r>
+              <a:rPr lang="en-US" sz="1200" dirty="0">
+                <a:solidFill>
+                  <a:srgbClr val="FFFFFF"/>
+                </a:solidFill>
+                <a:latin typeface="Arial"/>
+              </a:rPr>
+              <a:t>• Easier updates: update or re-index documents rather than fine-tuning the model for each change.</a:t>
+            </a:r>
+          </a:p>
+          <a:p>
+            <a:pPr defTabSz="457200">
+              <a:lnSpc>
+                <a:spcPct val="100000"/>
+              </a:lnSpc>
+              <a:spcAft>
+                <a:spcPts val="901"/>
+              </a:spcAft>
+            </a:pPr>
+            <a:r>
+              <a:rPr lang="en-US" sz="1200" dirty="0">
+                <a:solidFill>
+                  <a:srgbClr val="FFFFFF"/>
+                </a:solidFill>
+                <a:latin typeface="Arial"/>
+              </a:rPr>
+              <a:t>• Traceability: retrieved passages and source titles can help show where an answer came from.</a:t>
+            </a:r>
+          </a:p>
+          <a:p>
+            <a:pPr defTabSz="457200">
+              <a:lnSpc>
+                <a:spcPct val="100000"/>
+              </a:lnSpc>
+              <a:spcAft>
+                <a:spcPts val="901"/>
+              </a:spcAft>
+            </a:pPr>
+            <a:r>
+              <a:rPr lang="en-US" sz="1200" dirty="0">
+                <a:solidFill>
+                  <a:srgbClr val="FFFFFF"/>
+                </a:solidFill>
+                <a:latin typeface="Arial"/>
+              </a:rPr>
+              <a:t>• Potentially fewer unsupported answers: the system can be instructed to answer from retrieved material or say when it doesn’t know, though RAG does not eliminate errors or hallucinations.</a:t>
+            </a:r>
+          </a:p>
+          <a:p>
+            <a:pPr defTabSz="457200">
+              <a:lnSpc>
+                <a:spcPct val="100000"/>
+              </a:lnSpc>
+              <a:spcAft>
+                <a:spcPts val="901"/>
+              </a:spcAft>
+            </a:pPr>
+            <a:r>
+              <a:rPr lang="en-US" sz="1200" dirty="0">
+                <a:solidFill>
+                  <a:srgbClr val="FFFFFF"/>
+                </a:solidFill>
+                <a:latin typeface="Arial"/>
+              </a:rPr>
+              <a:t>• More controlled use of knowledge: retrieval can be designed around approved sources, with access controls added where needed.</a:t>
+            </a:r>
+            <a:endParaRPr lang="en-US" sz="1200" b="0" u="none" strike="noStrike" dirty="0">
               <a:solidFill>
                 <a:srgbClr val="FFFFFF"/>
               </a:solidFill>
@@ -14899,26 +15809,26 @@
       </p:sp>
       <p:sp>
         <p:nvSpPr>
-          <p:cNvPr id="346" name="Rounded Rectangle 12"/>
+          <p:cNvPr id="329" name="Rounded Rectangle 10"/>
           <p:cNvSpPr/>
           <p:nvPr/>
         </p:nvSpPr>
         <p:spPr>
           <a:xfrm>
-            <a:off x="685800" y="3392280"/>
-            <a:ext cx="5623200" cy="566640"/>
+            <a:off x="6263640" y="514874"/>
+            <a:ext cx="5303160" cy="5995726"/>
           </a:xfrm>
           <a:prstGeom prst="roundRect">
             <a:avLst>
-              <a:gd name="adj" fmla="val 16667"/>
+              <a:gd name="adj" fmla="val 4496"/>
             </a:avLst>
           </a:prstGeom>
           <a:solidFill>
-            <a:srgbClr val="141D33"/>
+            <a:srgbClr val="271C24"/>
           </a:solidFill>
           <a:ln w="12700">
             <a:solidFill>
-              <a:srgbClr val="1A2641"/>
+              <a:srgbClr val="704252"/>
             </a:solidFill>
             <a:round/>
           </a:ln>
@@ -14961,148 +15871,14 @@
       </p:sp>
       <p:sp>
         <p:nvSpPr>
-          <p:cNvPr id="347" name="TextBox 13"/>
+          <p:cNvPr id="330" name="Rounded Rectangle 11"/>
           <p:cNvSpPr/>
           <p:nvPr/>
         </p:nvSpPr>
         <p:spPr>
           <a:xfrm>
-            <a:off x="914400" y="3529440"/>
-            <a:ext cx="1691280" cy="219240"/>
-          </a:xfrm>
-          <a:prstGeom prst="rect">
-            <a:avLst/>
-          </a:prstGeom>
-          <a:noFill/>
-          <a:ln w="0">
-            <a:noFill/>
-          </a:ln>
-        </p:spPr>
-        <p:style>
-          <a:lnRef idx="0">
-            <a:scrgbClr r="0" g="0" b="0"/>
-          </a:lnRef>
-          <a:fillRef idx="0">
-            <a:scrgbClr r="0" g="0" b="0"/>
-          </a:fillRef>
-          <a:effectRef idx="0">
-            <a:scrgbClr r="0" g="0" b="0"/>
-          </a:effectRef>
-          <a:fontRef idx="minor"/>
-        </p:style>
-        <p:txBody>
-          <a:bodyPr lIns="36720" tIns="36720" rIns="36720" bIns="36720" anchor="t">
-            <a:spAutoFit/>
-          </a:bodyPr>
-          <a:lstStyle/>
-          <a:p>
-            <a:pPr defTabSz="457200">
-              <a:lnSpc>
-                <a:spcPct val="100000"/>
-              </a:lnSpc>
-              <a:spcAft>
-                <a:spcPts val="400"/>
-              </a:spcAft>
-            </a:pPr>
-            <a:r>
-              <a:rPr lang="en-US" sz="1300" b="1" u="none" strike="noStrike">
-                <a:solidFill>
-                  <a:srgbClr val="42D3E6"/>
-                </a:solidFill>
-                <a:effectLst/>
-                <a:uFillTx/>
-                <a:latin typeface="Aptos"/>
-              </a:rPr>
-              <a:t>Spring Boot</a:t>
-            </a:r>
-            <a:endParaRPr lang="en-US" sz="1300" b="0" u="none" strike="noStrike">
-              <a:solidFill>
-                <a:srgbClr val="FFFFFF"/>
-              </a:solidFill>
-              <a:effectLst/>
-              <a:uFillTx/>
-              <a:latin typeface="Arial"/>
-            </a:endParaRPr>
-          </a:p>
-        </p:txBody>
-      </p:sp>
-      <p:sp>
-        <p:nvSpPr>
-          <p:cNvPr id="348" name="TextBox 14"/>
-          <p:cNvSpPr/>
-          <p:nvPr/>
-        </p:nvSpPr>
-        <p:spPr>
-          <a:xfrm>
-            <a:off x="2560320" y="3493080"/>
-            <a:ext cx="3474360" cy="356400"/>
-          </a:xfrm>
-          <a:prstGeom prst="rect">
-            <a:avLst/>
-          </a:prstGeom>
-          <a:noFill/>
-          <a:ln w="0">
-            <a:noFill/>
-          </a:ln>
-        </p:spPr>
-        <p:style>
-          <a:lnRef idx="0">
-            <a:scrgbClr r="0" g="0" b="0"/>
-          </a:lnRef>
-          <a:fillRef idx="0">
-            <a:scrgbClr r="0" g="0" b="0"/>
-          </a:fillRef>
-          <a:effectRef idx="0">
-            <a:scrgbClr r="0" g="0" b="0"/>
-          </a:effectRef>
-          <a:fontRef idx="minor"/>
-        </p:style>
-        <p:txBody>
-          <a:bodyPr lIns="36720" tIns="36720" rIns="36720" bIns="36720" anchor="t">
-            <a:spAutoFit/>
-          </a:bodyPr>
-          <a:lstStyle/>
-          <a:p>
-            <a:pPr defTabSz="457200">
-              <a:lnSpc>
-                <a:spcPct val="100000"/>
-              </a:lnSpc>
-              <a:spcAft>
-                <a:spcPts val="400"/>
-              </a:spcAft>
-            </a:pPr>
-            <a:r>
-              <a:rPr lang="en-US" sz="1100" b="0" u="none" strike="noStrike">
-                <a:solidFill>
-                  <a:srgbClr val="F4F7FF"/>
-                </a:solidFill>
-                <a:effectLst/>
-                <a:uFillTx/>
-                <a:latin typeface="Aptos"/>
-              </a:rPr>
-              <a:t>owns the stable API and coordinates chat behavior across both modes.</a:t>
-            </a:r>
-            <a:endParaRPr lang="en-US" sz="1100" b="0" u="none" strike="noStrike">
-              <a:solidFill>
-                <a:srgbClr val="FFFFFF"/>
-              </a:solidFill>
-              <a:effectLst/>
-              <a:uFillTx/>
-              <a:latin typeface="Arial"/>
-            </a:endParaRPr>
-          </a:p>
-        </p:txBody>
-      </p:sp>
-      <p:sp>
-        <p:nvSpPr>
-          <p:cNvPr id="349" name="Rounded Rectangle 15"/>
-          <p:cNvSpPr/>
-          <p:nvPr/>
-        </p:nvSpPr>
-        <p:spPr>
-          <a:xfrm>
-            <a:off x="685800" y="4105800"/>
-            <a:ext cx="5623200" cy="566640"/>
+            <a:off x="6574680" y="799019"/>
+            <a:ext cx="1737000" cy="292320"/>
           </a:xfrm>
           <a:prstGeom prst="roundRect">
             <a:avLst>
@@ -15110,13 +15886,10 @@
             </a:avLst>
           </a:prstGeom>
           <a:solidFill>
-            <a:srgbClr val="141D33"/>
+            <a:srgbClr val="FF7382"/>
           </a:solidFill>
-          <a:ln w="12700">
-            <a:solidFill>
-              <a:srgbClr val="1A2641"/>
-            </a:solidFill>
-            <a:round/>
+          <a:ln>
+            <a:noFill/>
           </a:ln>
           <a:effectLst>
             <a:outerShdw blurRad="39960" dist="23040" dir="5400000" rotWithShape="0">
@@ -15144,7 +15917,7 @@
           </a:bodyPr>
           <a:lstStyle/>
           <a:p>
-            <a:endParaRPr lang="en-US" sz="1800" b="0" u="none" strike="noStrike">
+            <a:endParaRPr lang="en-US" sz="1800" b="0" u="none" strike="noStrike" dirty="0">
               <a:solidFill>
                 <a:schemeClr val="lt1"/>
               </a:solidFill>
@@ -15157,14 +15930,14 @@
       </p:sp>
       <p:sp>
         <p:nvSpPr>
-          <p:cNvPr id="350" name="TextBox 16"/>
+          <p:cNvPr id="331" name="TextBox 12"/>
           <p:cNvSpPr/>
           <p:nvPr/>
         </p:nvSpPr>
         <p:spPr>
           <a:xfrm>
-            <a:off x="914400" y="4242960"/>
-            <a:ext cx="1691280" cy="219240"/>
+            <a:off x="6611220" y="866841"/>
+            <a:ext cx="1663920" cy="156675"/>
           </a:xfrm>
           <a:prstGeom prst="rect">
             <a:avLst/>
@@ -15187,12 +15960,12 @@
           <a:fontRef idx="minor"/>
         </p:style>
         <p:txBody>
-          <a:bodyPr lIns="36720" tIns="36720" rIns="36720" bIns="36720" anchor="t">
+          <a:bodyPr lIns="9000" tIns="9000" rIns="9000" bIns="9000" anchor="ctr">
             <a:spAutoFit/>
           </a:bodyPr>
           <a:lstStyle/>
           <a:p>
-            <a:pPr defTabSz="457200">
+            <a:pPr algn="ctr" defTabSz="457200">
               <a:lnSpc>
                 <a:spcPct val="100000"/>
               </a:lnSpc>
@@ -15201,37 +15974,29 @@
               </a:spcAft>
             </a:pPr>
             <a:r>
-              <a:rPr lang="en-US" sz="1300" b="1" u="none" strike="noStrike">
-                <a:solidFill>
-                  <a:srgbClr val="A07DFF"/>
-                </a:solidFill>
-                <a:effectLst/>
-                <a:uFillTx/>
-                <a:latin typeface="Aptos"/>
-              </a:rPr>
-              <a:t>Infrastructure as Code</a:t>
-            </a:r>
-            <a:endParaRPr lang="en-US" sz="1300" b="0" u="none" strike="noStrike">
-              <a:solidFill>
-                <a:srgbClr val="FFFFFF"/>
-              </a:solidFill>
-              <a:effectLst/>
-              <a:uFillTx/>
-              <a:latin typeface="Arial"/>
-            </a:endParaRPr>
-          </a:p>
-        </p:txBody>
-      </p:sp>
-      <p:sp>
-        <p:nvSpPr>
-          <p:cNvPr id="351" name="TextBox 17"/>
+              <a:rPr lang="en-US" sz="900" b="0" u="none" strike="noStrike" dirty="0">
+                <a:solidFill>
+                  <a:srgbClr val="FFFFFF"/>
+                </a:solidFill>
+                <a:effectLst/>
+                <a:uFillTx/>
+                <a:latin typeface="Arial"/>
+              </a:rPr>
+              <a:t>Disadvantages</a:t>
+            </a:r>
+          </a:p>
+        </p:txBody>
+      </p:sp>
+      <p:sp>
+        <p:nvSpPr>
+          <p:cNvPr id="332" name="TextBox 13"/>
           <p:cNvSpPr/>
           <p:nvPr/>
         </p:nvSpPr>
         <p:spPr>
           <a:xfrm>
-            <a:off x="2560320" y="4206240"/>
-            <a:ext cx="3474360" cy="356400"/>
+            <a:off x="6644711" y="1253160"/>
+            <a:ext cx="4617360" cy="5089966"/>
           </a:xfrm>
           <a:prstGeom prst="rect">
             <a:avLst/>
@@ -15254,7 +16019,7 @@
           <a:fontRef idx="minor"/>
         </p:style>
         <p:txBody>
-          <a:bodyPr lIns="36720" tIns="36720" rIns="36720" bIns="36720" anchor="t">
+          <a:bodyPr lIns="45720" tIns="27360" rIns="45720" bIns="27360" anchor="t">
             <a:spAutoFit/>
           </a:bodyPr>
           <a:lstStyle/>
@@ -15264,678 +16029,114 @@
                 <a:spcPct val="100000"/>
               </a:lnSpc>
               <a:spcAft>
-                <a:spcPts val="400"/>
+                <a:spcPts val="1301"/>
               </a:spcAft>
             </a:pPr>
             <a:r>
-              <a:rPr lang="en-US" sz="1100" b="0" u="none" strike="noStrike">
-                <a:solidFill>
-                  <a:srgbClr val="F4F7FF"/>
-                </a:solidFill>
-                <a:effectLst/>
-                <a:uFillTx/>
-                <a:latin typeface="Aptos"/>
-              </a:rPr>
-              <a:t>captures repeatable development setup — production still needs platform-specific controls.</a:t>
-            </a:r>
-            <a:endParaRPr lang="en-US" sz="1100" b="0" u="none" strike="noStrike">
-              <a:solidFill>
-                <a:srgbClr val="FFFFFF"/>
-              </a:solidFill>
-              <a:effectLst/>
-              <a:uFillTx/>
-              <a:latin typeface="Arial"/>
-            </a:endParaRPr>
-          </a:p>
-        </p:txBody>
-      </p:sp>
-      <p:sp>
-        <p:nvSpPr>
-          <p:cNvPr id="352" name="Rounded Rectangle 18"/>
-          <p:cNvSpPr/>
-          <p:nvPr/>
-        </p:nvSpPr>
-        <p:spPr>
-          <a:xfrm>
-            <a:off x="6720840" y="1965960"/>
-            <a:ext cx="4800240" cy="3611520"/>
-          </a:xfrm>
-          <a:prstGeom prst="roundRect">
-            <a:avLst>
-              <a:gd name="adj" fmla="val 16667"/>
-            </a:avLst>
-          </a:prstGeom>
-          <a:solidFill>
-            <a:srgbClr val="101F2B"/>
-          </a:solidFill>
-          <a:ln w="12700">
-            <a:solidFill>
-              <a:srgbClr val="42D3E6"/>
-            </a:solidFill>
-            <a:round/>
-          </a:ln>
-          <a:effectLst>
-            <a:outerShdw blurRad="39960" dist="23040" dir="5400000" rotWithShape="0">
-              <a:srgbClr val="000000">
-                <a:alpha val="35000"/>
-              </a:srgbClr>
-            </a:outerShdw>
-          </a:effectLst>
-        </p:spPr>
-        <p:style>
-          <a:lnRef idx="1">
-            <a:schemeClr val="accent1"/>
-          </a:lnRef>
-          <a:fillRef idx="3">
-            <a:schemeClr val="accent1"/>
-          </a:fillRef>
-          <a:effectRef idx="2">
-            <a:schemeClr val="accent1"/>
-          </a:effectRef>
-          <a:fontRef idx="minor"/>
-        </p:style>
-        <p:txBody>
-          <a:bodyPr lIns="90000" tIns="45000" rIns="90000" bIns="45000" anchor="ctr">
-            <a:noAutofit/>
-          </a:bodyPr>
-          <a:lstStyle/>
-          <a:p>
-            <a:endParaRPr lang="en-US" sz="1800" b="0" u="none" strike="noStrike">
-              <a:solidFill>
-                <a:schemeClr val="lt1"/>
-              </a:solidFill>
-              <a:effectLst/>
-              <a:uFillTx/>
-              <a:latin typeface="Calibri"/>
-            </a:endParaRPr>
-          </a:p>
-        </p:txBody>
-      </p:sp>
-      <p:sp>
-        <p:nvSpPr>
-          <p:cNvPr id="353" name="Rounded Rectangle 19"/>
-          <p:cNvSpPr/>
-          <p:nvPr/>
-        </p:nvSpPr>
-        <p:spPr>
-          <a:xfrm>
-            <a:off x="7040880" y="2267640"/>
-            <a:ext cx="1096920" cy="292320"/>
-          </a:xfrm>
-          <a:prstGeom prst="roundRect">
-            <a:avLst>
-              <a:gd name="adj" fmla="val 16667"/>
-            </a:avLst>
-          </a:prstGeom>
-          <a:solidFill>
-            <a:srgbClr val="48E0B8"/>
-          </a:solidFill>
-          <a:ln>
-            <a:noFill/>
-          </a:ln>
-          <a:effectLst>
-            <a:outerShdw blurRad="39960" dist="23040" dir="5400000" rotWithShape="0">
-              <a:srgbClr val="000000">
-                <a:alpha val="35000"/>
-              </a:srgbClr>
-            </a:outerShdw>
-          </a:effectLst>
-        </p:spPr>
-        <p:style>
-          <a:lnRef idx="1">
-            <a:schemeClr val="accent1"/>
-          </a:lnRef>
-          <a:fillRef idx="3">
-            <a:schemeClr val="accent1"/>
-          </a:fillRef>
-          <a:effectRef idx="2">
-            <a:schemeClr val="accent1"/>
-          </a:effectRef>
-          <a:fontRef idx="minor"/>
-        </p:style>
-        <p:txBody>
-          <a:bodyPr lIns="90000" tIns="45000" rIns="90000" bIns="45000" anchor="ctr">
-            <a:noAutofit/>
-          </a:bodyPr>
-          <a:lstStyle/>
-          <a:p>
-            <a:endParaRPr lang="en-US" sz="1800" b="0" u="none" strike="noStrike">
-              <a:solidFill>
-                <a:schemeClr val="lt1"/>
-              </a:solidFill>
-              <a:effectLst/>
-              <a:uFillTx/>
-              <a:latin typeface="Calibri"/>
-            </a:endParaRPr>
-          </a:p>
-        </p:txBody>
-      </p:sp>
-      <p:sp>
-        <p:nvSpPr>
-          <p:cNvPr id="354" name="TextBox 20"/>
-          <p:cNvSpPr/>
-          <p:nvPr/>
-        </p:nvSpPr>
-        <p:spPr>
-          <a:xfrm>
-            <a:off x="7077600" y="2286000"/>
-            <a:ext cx="1023840" cy="228240"/>
-          </a:xfrm>
-          <a:prstGeom prst="rect">
-            <a:avLst/>
-          </a:prstGeom>
-          <a:noFill/>
-          <a:ln w="0">
-            <a:noFill/>
-          </a:ln>
-        </p:spPr>
-        <p:style>
-          <a:lnRef idx="0">
-            <a:scrgbClr r="0" g="0" b="0"/>
-          </a:lnRef>
-          <a:fillRef idx="0">
-            <a:scrgbClr r="0" g="0" b="0"/>
-          </a:fillRef>
-          <a:effectRef idx="0">
-            <a:scrgbClr r="0" g="0" b="0"/>
-          </a:effectRef>
-          <a:fontRef idx="minor"/>
-        </p:style>
-        <p:txBody>
-          <a:bodyPr lIns="9000" tIns="9000" rIns="9000" bIns="9000" anchor="ctr">
-            <a:spAutoFit/>
-          </a:bodyPr>
-          <a:lstStyle/>
-          <a:p>
-            <a:pPr algn="ctr" defTabSz="457200">
+              <a:rPr lang="en-US" sz="1300" dirty="0">
+                <a:solidFill>
+                  <a:srgbClr val="FFFFFF"/>
+                </a:solidFill>
+                <a:latin typeface="Arial"/>
+              </a:rPr>
+              <a:t>• Retrieval can miss or mis-rank information. Poor chunking, vague questions, or weak embeddings can surface irrelevant passages or miss the right ones.</a:t>
+            </a:r>
+          </a:p>
+          <a:p>
+            <a:pPr defTabSz="457200">
               <a:lnSpc>
                 <a:spcPct val="100000"/>
               </a:lnSpc>
               <a:spcAft>
-                <a:spcPts val="400"/>
+                <a:spcPts val="1301"/>
               </a:spcAft>
             </a:pPr>
             <a:r>
-              <a:rPr lang="en-US" sz="900" b="1" u="none" strike="noStrike">
-                <a:solidFill>
-                  <a:srgbClr val="0A1020"/>
-                </a:solidFill>
-                <a:effectLst/>
-                <a:uFillTx/>
-                <a:latin typeface="Aptos"/>
-              </a:rPr>
-              <a:t>LIVE DEMO</a:t>
-            </a:r>
-            <a:endParaRPr lang="en-US" sz="900" b="0" u="none" strike="noStrike">
-              <a:solidFill>
-                <a:srgbClr val="FFFFFF"/>
-              </a:solidFill>
-              <a:effectLst/>
-              <a:uFillTx/>
-              <a:latin typeface="Arial"/>
-            </a:endParaRPr>
-          </a:p>
-        </p:txBody>
-      </p:sp>
-      <p:sp>
-        <p:nvSpPr>
-          <p:cNvPr id="355" name="TextBox 21"/>
-          <p:cNvSpPr/>
-          <p:nvPr/>
-        </p:nvSpPr>
-        <p:spPr>
-          <a:xfrm>
-            <a:off x="7059240" y="2788920"/>
-            <a:ext cx="3840120" cy="273960"/>
-          </a:xfrm>
-          <a:prstGeom prst="rect">
-            <a:avLst/>
-          </a:prstGeom>
-          <a:noFill/>
-          <a:ln w="0">
-            <a:noFill/>
-          </a:ln>
-        </p:spPr>
-        <p:style>
-          <a:lnRef idx="0">
-            <a:scrgbClr r="0" g="0" b="0"/>
-          </a:lnRef>
-          <a:fillRef idx="0">
-            <a:scrgbClr r="0" g="0" b="0"/>
-          </a:fillRef>
-          <a:effectRef idx="0">
-            <a:scrgbClr r="0" g="0" b="0"/>
-          </a:effectRef>
-          <a:fontRef idx="minor"/>
-        </p:style>
-        <p:txBody>
-          <a:bodyPr lIns="36720" tIns="36720" rIns="36720" bIns="36720" anchor="t">
-            <a:spAutoFit/>
-          </a:bodyPr>
-          <a:lstStyle/>
+              <a:rPr lang="en-US" sz="1300" dirty="0">
+                <a:solidFill>
+                  <a:srgbClr val="FFFFFF"/>
+                </a:solidFill>
+                <a:latin typeface="Arial"/>
+              </a:rPr>
+              <a:t>• Answers can still be wrong. The model may misinterpret retrieved text, combine sources incorrectly, or invent details; grounding reduces risk but doesn’t guarantee correctness.</a:t>
+            </a:r>
+          </a:p>
           <a:p>
             <a:pPr defTabSz="457200">
               <a:lnSpc>
                 <a:spcPct val="100000"/>
               </a:lnSpc>
               <a:spcAft>
-                <a:spcPts val="400"/>
+                <a:spcPts val="1301"/>
               </a:spcAft>
             </a:pPr>
             <a:r>
-              <a:rPr lang="en-US" sz="1500" b="1" u="none" strike="noStrike">
-                <a:solidFill>
-                  <a:srgbClr val="F4F7FF"/>
-                </a:solidFill>
-                <a:effectLst/>
-                <a:uFillTx/>
-                <a:latin typeface="Aptos"/>
-              </a:rPr>
-              <a:t>1  Start the local stack</a:t>
-            </a:r>
-            <a:endParaRPr lang="en-US" sz="1500" b="0" u="none" strike="noStrike">
-              <a:solidFill>
-                <a:srgbClr val="FFFFFF"/>
-              </a:solidFill>
-              <a:effectLst/>
-              <a:uFillTx/>
-              <a:latin typeface="Arial"/>
-            </a:endParaRPr>
-          </a:p>
-        </p:txBody>
-      </p:sp>
-      <p:sp>
-        <p:nvSpPr>
-          <p:cNvPr id="356" name="TextBox 22"/>
-          <p:cNvSpPr/>
-          <p:nvPr/>
-        </p:nvSpPr>
-        <p:spPr>
-          <a:xfrm>
-            <a:off x="7242120" y="3127320"/>
-            <a:ext cx="3565800" cy="319680"/>
-          </a:xfrm>
-          <a:prstGeom prst="rect">
-            <a:avLst/>
-          </a:prstGeom>
-          <a:noFill/>
-          <a:ln w="0">
-            <a:noFill/>
-          </a:ln>
-        </p:spPr>
-        <p:style>
-          <a:lnRef idx="0">
-            <a:scrgbClr r="0" g="0" b="0"/>
-          </a:lnRef>
-          <a:fillRef idx="0">
-            <a:scrgbClr r="0" g="0" b="0"/>
-          </a:fillRef>
-          <a:effectRef idx="0">
-            <a:scrgbClr r="0" g="0" b="0"/>
-          </a:effectRef>
-          <a:fontRef idx="minor"/>
-        </p:style>
-        <p:txBody>
-          <a:bodyPr lIns="36720" tIns="36720" rIns="36720" bIns="36720" anchor="t">
-            <a:spAutoFit/>
-          </a:bodyPr>
-          <a:lstStyle/>
+              <a:rPr lang="en-US" sz="1300" dirty="0">
+                <a:solidFill>
+                  <a:srgbClr val="FFFFFF"/>
+                </a:solidFill>
+                <a:latin typeface="Arial"/>
+              </a:rPr>
+              <a:t>• Knowledge needs ongoing care. Documents must be accurate, current, well organized, and re-indexed when they change. Conflicting or outdated sources can produce confusing answers.</a:t>
+            </a:r>
+          </a:p>
           <a:p>
             <a:pPr defTabSz="457200">
               <a:lnSpc>
                 <a:spcPct val="100000"/>
               </a:lnSpc>
               <a:spcAft>
-                <a:spcPts val="400"/>
+                <a:spcPts val="1301"/>
               </a:spcAft>
             </a:pPr>
             <a:r>
-              <a:rPr lang="en-US" sz="1600" b="1" u="none" strike="noStrike">
-                <a:solidFill>
-                  <a:srgbClr val="48E0B8"/>
-                </a:solidFill>
-                <a:effectLst/>
-                <a:uFillTx/>
-                <a:latin typeface="Aptos Mono"/>
-              </a:rPr>
-              <a:t>make up</a:t>
-            </a:r>
-            <a:endParaRPr lang="en-US" sz="1600" b="0" u="none" strike="noStrike">
-              <a:solidFill>
-                <a:srgbClr val="FFFFFF"/>
-              </a:solidFill>
-              <a:effectLst/>
-              <a:uFillTx/>
-              <a:latin typeface="Arial"/>
-            </a:endParaRPr>
-          </a:p>
-        </p:txBody>
-      </p:sp>
-      <p:sp>
-        <p:nvSpPr>
-          <p:cNvPr id="357" name="TextBox 23"/>
-          <p:cNvSpPr/>
-          <p:nvPr/>
-        </p:nvSpPr>
-        <p:spPr>
-          <a:xfrm>
-            <a:off x="7059240" y="3657600"/>
-            <a:ext cx="3977280" cy="273960"/>
-          </a:xfrm>
-          <a:prstGeom prst="rect">
-            <a:avLst/>
-          </a:prstGeom>
-          <a:noFill/>
-          <a:ln w="0">
-            <a:noFill/>
-          </a:ln>
-        </p:spPr>
-        <p:style>
-          <a:lnRef idx="0">
-            <a:scrgbClr r="0" g="0" b="0"/>
-          </a:lnRef>
-          <a:fillRef idx="0">
-            <a:scrgbClr r="0" g="0" b="0"/>
-          </a:fillRef>
-          <a:effectRef idx="0">
-            <a:scrgbClr r="0" g="0" b="0"/>
-          </a:effectRef>
-          <a:fontRef idx="minor"/>
-        </p:style>
-        <p:txBody>
-          <a:bodyPr lIns="36720" tIns="36720" rIns="36720" bIns="36720" anchor="t">
-            <a:spAutoFit/>
-          </a:bodyPr>
-          <a:lstStyle/>
+              <a:rPr lang="en-US" sz="1300" dirty="0">
+                <a:solidFill>
+                  <a:srgbClr val="FFFFFF"/>
+                </a:solidFill>
+                <a:latin typeface="Arial"/>
+              </a:rPr>
+              <a:t>• Privacy and access control are harder. Retrieved text is sent to the model provider, and retrieval must respect who is allowed to see each document. RAG does not provide those controls automatically.</a:t>
+            </a:r>
+          </a:p>
           <a:p>
             <a:pPr defTabSz="457200">
               <a:lnSpc>
                 <a:spcPct val="100000"/>
               </a:lnSpc>
               <a:spcAft>
-                <a:spcPts val="400"/>
+                <a:spcPts val="1301"/>
               </a:spcAft>
             </a:pPr>
             <a:r>
-              <a:rPr lang="en-US" sz="1400" b="1" u="none" strike="noStrike">
-                <a:solidFill>
-                  <a:srgbClr val="F4F7FF"/>
-                </a:solidFill>
-                <a:effectLst/>
-                <a:uFillTx/>
-                <a:latin typeface="Aptos"/>
-              </a:rPr>
-              <a:t>2  Ask about the release checklist</a:t>
-            </a:r>
-            <a:endParaRPr lang="en-US" sz="1400" b="0" u="none" strike="noStrike">
-              <a:solidFill>
-                <a:srgbClr val="FFFFFF"/>
-              </a:solidFill>
-              <a:effectLst/>
-              <a:uFillTx/>
-              <a:latin typeface="Arial"/>
-            </a:endParaRPr>
-          </a:p>
-        </p:txBody>
-      </p:sp>
-      <p:sp>
-        <p:nvSpPr>
-          <p:cNvPr id="358" name="TextBox 24"/>
-          <p:cNvSpPr/>
-          <p:nvPr/>
-        </p:nvSpPr>
-        <p:spPr>
-          <a:xfrm>
-            <a:off x="7242120" y="4005000"/>
-            <a:ext cx="3565800" cy="273960"/>
-          </a:xfrm>
-          <a:prstGeom prst="rect">
-            <a:avLst/>
-          </a:prstGeom>
-          <a:noFill/>
-          <a:ln w="0">
-            <a:noFill/>
-          </a:ln>
-        </p:spPr>
-        <p:style>
-          <a:lnRef idx="0">
-            <a:scrgbClr r="0" g="0" b="0"/>
-          </a:lnRef>
-          <a:fillRef idx="0">
-            <a:scrgbClr r="0" g="0" b="0"/>
-          </a:fillRef>
-          <a:effectRef idx="0">
-            <a:scrgbClr r="0" g="0" b="0"/>
-          </a:effectRef>
-          <a:fontRef idx="minor"/>
-        </p:style>
-        <p:txBody>
-          <a:bodyPr lIns="36720" tIns="36720" rIns="36720" bIns="36720" anchor="t">
-            <a:spAutoFit/>
-          </a:bodyPr>
-          <a:lstStyle/>
+              <a:rPr lang="en-US" sz="1300" dirty="0">
+                <a:solidFill>
+                  <a:srgbClr val="FFFFFF"/>
+                </a:solidFill>
+                <a:latin typeface="Arial"/>
+              </a:rPr>
+              <a:t>• More infrastructure and latency. Embedding, indexing, vector storage, retrieval, and generation add operational complexity, cost, and response time.</a:t>
+            </a:r>
+          </a:p>
           <a:p>
             <a:pPr defTabSz="457200">
               <a:lnSpc>
                 <a:spcPct val="100000"/>
               </a:lnSpc>
               <a:spcAft>
-                <a:spcPts val="400"/>
+                <a:spcPts val="1301"/>
               </a:spcAft>
             </a:pPr>
             <a:r>
-              <a:rPr lang="en-US" sz="1400" b="1" u="none" strike="noStrike">
-                <a:solidFill>
-                  <a:srgbClr val="42D3E6"/>
-                </a:solidFill>
-                <a:effectLst/>
-                <a:uFillTx/>
-                <a:latin typeface="Aptos Mono"/>
-              </a:rPr>
-              <a:t>POST /api/rag/chat</a:t>
-            </a:r>
-            <a:endParaRPr lang="en-US" sz="1400" b="0" u="none" strike="noStrike">
-              <a:solidFill>
-                <a:srgbClr val="FFFFFF"/>
-              </a:solidFill>
-              <a:effectLst/>
-              <a:uFillTx/>
-              <a:latin typeface="Arial"/>
-            </a:endParaRPr>
-          </a:p>
-        </p:txBody>
-      </p:sp>
-      <p:sp>
-        <p:nvSpPr>
-          <p:cNvPr id="359" name="TextBox 25"/>
-          <p:cNvSpPr/>
-          <p:nvPr/>
-        </p:nvSpPr>
-        <p:spPr>
-          <a:xfrm>
-            <a:off x="7059240" y="4480560"/>
-            <a:ext cx="3931560" cy="273960"/>
-          </a:xfrm>
-          <a:prstGeom prst="rect">
-            <a:avLst/>
-          </a:prstGeom>
-          <a:noFill/>
-          <a:ln w="0">
-            <a:noFill/>
-          </a:ln>
-        </p:spPr>
-        <p:style>
-          <a:lnRef idx="0">
-            <a:scrgbClr r="0" g="0" b="0"/>
-          </a:lnRef>
-          <a:fillRef idx="0">
-            <a:scrgbClr r="0" g="0" b="0"/>
-          </a:fillRef>
-          <a:effectRef idx="0">
-            <a:scrgbClr r="0" g="0" b="0"/>
-          </a:effectRef>
-          <a:fontRef idx="minor"/>
-        </p:style>
-        <p:txBody>
-          <a:bodyPr lIns="36720" tIns="36720" rIns="36720" bIns="36720" anchor="t">
-            <a:spAutoFit/>
-          </a:bodyPr>
-          <a:lstStyle/>
-          <a:p>
-            <a:pPr defTabSz="457200">
-              <a:lnSpc>
-                <a:spcPct val="100000"/>
-              </a:lnSpc>
-              <a:spcAft>
-                <a:spcPts val="400"/>
-              </a:spcAft>
-            </a:pPr>
-            <a:r>
-              <a:rPr lang="en-US" sz="1400" b="1" u="none" strike="noStrike">
-                <a:solidFill>
-                  <a:srgbClr val="F4F7FF"/>
-                </a:solidFill>
-                <a:effectLst/>
-                <a:uFillTx/>
-                <a:latin typeface="Aptos"/>
-              </a:rPr>
-              <a:t>3  Contrast local vs. Konnect</a:t>
-            </a:r>
-            <a:endParaRPr lang="en-US" sz="1400" b="0" u="none" strike="noStrike">
-              <a:solidFill>
-                <a:srgbClr val="FFFFFF"/>
-              </a:solidFill>
-              <a:effectLst/>
-              <a:uFillTx/>
-              <a:latin typeface="Arial"/>
-            </a:endParaRPr>
-          </a:p>
-        </p:txBody>
-      </p:sp>
-      <p:sp>
-        <p:nvSpPr>
-          <p:cNvPr id="360" name="TextBox 26"/>
-          <p:cNvSpPr/>
-          <p:nvPr/>
-        </p:nvSpPr>
-        <p:spPr>
-          <a:xfrm>
-            <a:off x="7242120" y="4892040"/>
-            <a:ext cx="3885840" cy="438480"/>
-          </a:xfrm>
-          <a:prstGeom prst="rect">
-            <a:avLst/>
-          </a:prstGeom>
-          <a:noFill/>
-          <a:ln w="0">
-            <a:noFill/>
-          </a:ln>
-        </p:spPr>
-        <p:style>
-          <a:lnRef idx="0">
-            <a:scrgbClr r="0" g="0" b="0"/>
-          </a:lnRef>
-          <a:fillRef idx="0">
-            <a:scrgbClr r="0" g="0" b="0"/>
-          </a:fillRef>
-          <a:effectRef idx="0">
-            <a:scrgbClr r="0" g="0" b="0"/>
-          </a:effectRef>
-          <a:fontRef idx="minor"/>
-        </p:style>
-        <p:txBody>
-          <a:bodyPr lIns="36720" tIns="36720" rIns="36720" bIns="36720" anchor="t">
-            <a:spAutoFit/>
-          </a:bodyPr>
-          <a:lstStyle/>
-          <a:p>
-            <a:pPr defTabSz="457200">
-              <a:lnSpc>
-                <a:spcPct val="100000"/>
-              </a:lnSpc>
-              <a:spcAft>
-                <a:spcPts val="400"/>
-              </a:spcAft>
-            </a:pPr>
-            <a:r>
-              <a:rPr lang="en-US" sz="1000" b="0" u="none" strike="noStrike">
-                <a:solidFill>
-                  <a:srgbClr val="AEBBD3"/>
-                </a:solidFill>
-                <a:effectLst/>
-                <a:uFillTx/>
-                <a:latin typeface="Aptos Mono"/>
-              </a:rPr>
-              <a:t>{"message":"What is the project release checklist?"}</a:t>
-            </a:r>
-            <a:endParaRPr lang="en-US" sz="1000" b="0" u="none" strike="noStrike">
-              <a:solidFill>
-                <a:srgbClr val="FFFFFF"/>
-              </a:solidFill>
-              <a:effectLst/>
-              <a:uFillTx/>
-              <a:latin typeface="Arial"/>
-            </a:endParaRPr>
-          </a:p>
-        </p:txBody>
-      </p:sp>
-      <p:sp>
-        <p:nvSpPr>
-          <p:cNvPr id="361" name="TextBox 27"/>
-          <p:cNvSpPr/>
-          <p:nvPr/>
-        </p:nvSpPr>
-        <p:spPr>
-          <a:xfrm>
-            <a:off x="777240" y="5961960"/>
-            <a:ext cx="10698120" cy="383760"/>
-          </a:xfrm>
-          <a:prstGeom prst="rect">
-            <a:avLst/>
-          </a:prstGeom>
-          <a:noFill/>
-          <a:ln w="0">
-            <a:noFill/>
-          </a:ln>
-        </p:spPr>
-        <p:style>
-          <a:lnRef idx="0">
-            <a:scrgbClr r="0" g="0" b="0"/>
-          </a:lnRef>
-          <a:fillRef idx="0">
-            <a:scrgbClr r="0" g="0" b="0"/>
-          </a:fillRef>
-          <a:effectRef idx="0">
-            <a:scrgbClr r="0" g="0" b="0"/>
-          </a:effectRef>
-          <a:fontRef idx="minor"/>
-        </p:style>
-        <p:txBody>
-          <a:bodyPr lIns="36720" tIns="36720" rIns="36720" bIns="36720" anchor="t">
-            <a:spAutoFit/>
-          </a:bodyPr>
-          <a:lstStyle/>
-          <a:p>
-            <a:pPr algn="ctr" defTabSz="457200">
-              <a:lnSpc>
-                <a:spcPct val="100000"/>
-              </a:lnSpc>
-              <a:spcAft>
-                <a:spcPts val="400"/>
-              </a:spcAft>
-            </a:pPr>
-            <a:r>
-              <a:rPr lang="en-US" sz="900" b="0" u="none" strike="noStrike">
-                <a:solidFill>
-                  <a:srgbClr val="AEBBD3"/>
-                </a:solidFill>
-                <a:effectLst/>
-                <a:uFillTx/>
-                <a:latin typeface="Aptos"/>
-              </a:rPr>
-              <a:t>Project references: README.md • knowledge/local-mode.md • src/main/kotlin/org/jesperancinha/kong/chatbot/ • compose*.yaml • kong/local.yaml • terraform/ • scripts/configure-konnect.sh</a:t>
-            </a:r>
-            <a:endParaRPr lang="en-US" sz="900" b="0" u="none" strike="noStrike">
+              <a:rPr lang="en-US" sz="1300" dirty="0">
+                <a:solidFill>
+                  <a:srgbClr val="FFFFFF"/>
+                </a:solidFill>
+                <a:latin typeface="Arial"/>
+              </a:rPr>
+              <a:t>• Security risks remain. Malicious or misleading text in documents can influence model behavior, so retrieved content must be treated as untrusted and tested against prompt-injection attempts.</a:t>
+            </a:r>
+            <a:endParaRPr lang="en-US" sz="1300" b="0" u="none" strike="noStrike" dirty="0">
               <a:solidFill>
                 <a:srgbClr val="FFFFFF"/>
               </a:solidFill>
@@ -16025,7 +16226,7 @@
               </a:spcAft>
             </a:pPr>
             <a:r>
-              <a:rPr lang="nl-NL" sz="1000" b="1" u="none" strike="noStrike">
+              <a:rPr lang="nl-NL" sz="1000" b="1" u="none" strike="noStrike" dirty="0">
                 <a:solidFill>
                   <a:srgbClr val="42D3E6"/>
                 </a:solidFill>
@@ -16033,9 +16234,29 @@
                 <a:uFillTx/>
                 <a:latin typeface="Aptos"/>
               </a:rPr>
+              <a:t>11</a:t>
+            </a:r>
+            <a:r>
+              <a:rPr lang="en-US" sz="1000" b="1" dirty="0">
+                <a:solidFill>
+                  <a:srgbClr val="42D3E6"/>
+                </a:solidFill>
+                <a:latin typeface="Aptos"/>
+              </a:rPr>
+              <a:t> • </a:t>
+            </a:r>
+            <a:r>
+              <a:rPr lang="nl-NL" sz="1000" b="1" u="none" strike="noStrike" dirty="0">
+                <a:solidFill>
+                  <a:srgbClr val="42D3E6"/>
+                </a:solidFill>
+                <a:effectLst/>
+                <a:uFillTx/>
+                <a:latin typeface="Aptos"/>
+              </a:rPr>
               <a:t>Bedankt!</a:t>
             </a:r>
-            <a:endParaRPr lang="en-US" sz="1000" b="0" u="none" strike="noStrike">
+            <a:endParaRPr lang="en-US" sz="1000" b="0" u="none" strike="noStrike" dirty="0">
               <a:solidFill>
                 <a:srgbClr val="FFFFFF"/>
               </a:solidFill>
@@ -16159,7 +16380,7 @@
               </a:spcAft>
             </a:pPr>
             <a:r>
-              <a:rPr lang="nl-NL" sz="1200" b="0" u="none" strike="noStrike">
+              <a:rPr lang="nl-NL" sz="1200" b="0" u="none" strike="noStrike" dirty="0">
                 <a:solidFill>
                   <a:srgbClr val="AEBBD3"/>
                 </a:solidFill>
@@ -16167,9 +16388,31 @@
                 <a:uFillTx/>
                 <a:latin typeface="Aptos"/>
               </a:rPr>
-              <a:t>Hoe combineer je API Gateway, IaC, Spring bij ontwikkeling van een RAG-chatbot</a:t>
-            </a:r>
-            <a:endParaRPr lang="en-US" sz="1200" b="0" u="none" strike="noStrike">
+              <a:t>Hoe combineer je API Gateway, </a:t>
+            </a:r>
+            <a:r>
+              <a:rPr lang="nl-NL" sz="1200" b="0" u="none" strike="noStrike" dirty="0" err="1">
+                <a:solidFill>
+                  <a:srgbClr val="AEBBD3"/>
+                </a:solidFill>
+                <a:effectLst/>
+                <a:uFillTx/>
+                <a:latin typeface="Aptos"/>
+              </a:rPr>
+              <a:t>IaC</a:t>
+            </a:r>
+            <a:r>
+              <a:rPr lang="nl-NL" sz="1200" b="0" u="none" strike="noStrike" dirty="0">
+                <a:solidFill>
+                  <a:srgbClr val="AEBBD3"/>
+                </a:solidFill>
+                <a:effectLst/>
+                <a:uFillTx/>
+                <a:latin typeface="Aptos"/>
+              </a:rPr>
+              <a:t>, Spring bij ontwikkeling van een RAG-chatbot</a:t>
+            </a:r>
+            <a:endParaRPr lang="en-US" sz="1200" b="0" u="none" strike="noStrike" dirty="0">
               <a:solidFill>
                 <a:srgbClr val="FFFFFF"/>
               </a:solidFill>
@@ -16317,16 +16560,42 @@
           </a:xfrm>
           <a:prstGeom prst="roundRect">
             <a:avLst>
-              <a:gd name="adj" fmla="val 16667"/>
+              <a:gd name="adj" fmla="val 3929"/>
             </a:avLst>
           </a:prstGeom>
           <a:solidFill>
             <a:srgbClr val="141D33"/>
           </a:solidFill>
           <a:ln w="12700">
-            <a:solidFill>
-              <a:srgbClr val="1A2641"/>
-            </a:solidFill>
+            <a:gradFill>
+              <a:gsLst>
+                <a:gs pos="0">
+                  <a:schemeClr val="accent1">
+                    <a:lumMod val="5000"/>
+                    <a:lumOff val="95000"/>
+                  </a:schemeClr>
+                </a:gs>
+                <a:gs pos="74000">
+                  <a:schemeClr val="accent1">
+                    <a:lumMod val="45000"/>
+                    <a:lumOff val="55000"/>
+                  </a:schemeClr>
+                </a:gs>
+                <a:gs pos="83000">
+                  <a:schemeClr val="accent1">
+                    <a:lumMod val="45000"/>
+                    <a:lumOff val="55000"/>
+                  </a:schemeClr>
+                </a:gs>
+                <a:gs pos="100000">
+                  <a:schemeClr val="accent1">
+                    <a:lumMod val="30000"/>
+                    <a:lumOff val="70000"/>
+                  </a:schemeClr>
+                </a:gs>
+              </a:gsLst>
+              <a:lin ang="5400000" scaled="1"/>
+            </a:gradFill>
             <a:round/>
           </a:ln>
           <a:effectLst>
@@ -16409,7 +16678,7 @@
               </a:lnSpc>
             </a:pPr>
             <a:r>
-              <a:rPr lang="nl-NL" sz="1800" b="1" u="none" strike="noStrike">
+              <a:rPr lang="nl-NL" sz="1800" b="1" u="none" strike="noStrike" dirty="0">
                 <a:solidFill>
                   <a:schemeClr val="lt1"/>
                 </a:solidFill>
@@ -16417,13 +16686,35 @@
                 <a:uFillTx/>
                 <a:latin typeface="Calibri"/>
               </a:rPr>
-              <a:t>Build a RAG Chatbot with Kong AI Gateway</a:t>
+              <a:t>Build a RAG Chatbot </a:t>
+            </a:r>
+            <a:r>
+              <a:rPr lang="nl-NL" sz="1800" b="1" u="none" strike="noStrike" dirty="0" err="1">
+                <a:solidFill>
+                  <a:schemeClr val="lt1"/>
+                </a:solidFill>
+                <a:effectLst/>
+                <a:uFillTx/>
+                <a:latin typeface="Calibri"/>
+              </a:rPr>
+              <a:t>with</a:t>
+            </a:r>
+            <a:r>
+              <a:rPr lang="nl-NL" sz="1800" b="1" u="none" strike="noStrike" dirty="0">
+                <a:solidFill>
+                  <a:schemeClr val="lt1"/>
+                </a:solidFill>
+                <a:effectLst/>
+                <a:uFillTx/>
+                <a:latin typeface="Calibri"/>
+              </a:rPr>
+              <a:t> Kong AI Gateway</a:t>
             </a:r>
             <a:br>
-              <a:rPr sz="1800"/>
+              <a:rPr sz="1800" dirty="0"/>
             </a:br>
             <a:r>
-              <a:rPr lang="nl-NL" sz="1800" b="1" u="none" strike="noStrike">
+              <a:rPr lang="nl-NL" sz="1800" b="1" u="none" strike="noStrike" dirty="0" err="1">
                 <a:solidFill>
                   <a:schemeClr val="lt1"/>
                 </a:solidFill>
@@ -16431,13 +16722,112 @@
                 <a:uFillTx/>
                 <a:latin typeface="Calibri"/>
               </a:rPr>
-              <a:t>Explore the project behind this presentation.</a:t>
+              <a:t>Explore</a:t>
+            </a:r>
+            <a:r>
+              <a:rPr lang="nl-NL" sz="1800" b="1" u="none" strike="noStrike" dirty="0">
+                <a:solidFill>
+                  <a:schemeClr val="lt1"/>
+                </a:solidFill>
+                <a:effectLst/>
+                <a:uFillTx/>
+                <a:latin typeface="Calibri"/>
+              </a:rPr>
+              <a:t> </a:t>
+            </a:r>
+            <a:r>
+              <a:rPr lang="nl-NL" sz="1800" b="1" u="none" strike="noStrike" dirty="0" err="1">
+                <a:solidFill>
+                  <a:schemeClr val="lt1"/>
+                </a:solidFill>
+                <a:effectLst/>
+                <a:uFillTx/>
+                <a:latin typeface="Calibri"/>
+              </a:rPr>
+              <a:t>the</a:t>
+            </a:r>
+            <a:r>
+              <a:rPr lang="nl-NL" sz="1800" b="1" u="none" strike="noStrike" dirty="0">
+                <a:solidFill>
+                  <a:schemeClr val="lt1"/>
+                </a:solidFill>
+                <a:effectLst/>
+                <a:uFillTx/>
+                <a:latin typeface="Calibri"/>
+              </a:rPr>
+              <a:t> project </a:t>
+            </a:r>
+            <a:r>
+              <a:rPr lang="nl-NL" sz="1800" b="1" u="none" strike="noStrike" dirty="0" err="1">
+                <a:solidFill>
+                  <a:schemeClr val="lt1"/>
+                </a:solidFill>
+                <a:effectLst/>
+                <a:uFillTx/>
+                <a:latin typeface="Calibri"/>
+              </a:rPr>
+              <a:t>behind</a:t>
+            </a:r>
+            <a:r>
+              <a:rPr lang="nl-NL" sz="1800" b="1" u="none" strike="noStrike" dirty="0">
+                <a:solidFill>
+                  <a:schemeClr val="lt1"/>
+                </a:solidFill>
+                <a:effectLst/>
+                <a:uFillTx/>
+                <a:latin typeface="Calibri"/>
+              </a:rPr>
+              <a:t> </a:t>
+            </a:r>
+            <a:r>
+              <a:rPr lang="nl-NL" sz="1800" b="1" u="none" strike="noStrike" dirty="0" err="1">
+                <a:solidFill>
+                  <a:schemeClr val="lt1"/>
+                </a:solidFill>
+                <a:effectLst/>
+                <a:uFillTx/>
+                <a:latin typeface="Calibri"/>
+              </a:rPr>
+              <a:t>this</a:t>
+            </a:r>
+            <a:r>
+              <a:rPr lang="nl-NL" sz="1800" b="1" u="none" strike="noStrike" dirty="0">
+                <a:solidFill>
+                  <a:schemeClr val="lt1"/>
+                </a:solidFill>
+                <a:effectLst/>
+                <a:uFillTx/>
+                <a:latin typeface="Calibri"/>
+              </a:rPr>
+              <a:t> </a:t>
+            </a:r>
+            <a:r>
+              <a:rPr lang="nl-NL" sz="1800" b="1" u="none" strike="noStrike" dirty="0" err="1">
+                <a:solidFill>
+                  <a:schemeClr val="lt1"/>
+                </a:solidFill>
+                <a:effectLst/>
+                <a:uFillTx/>
+                <a:latin typeface="Calibri"/>
+              </a:rPr>
+              <a:t>presentation</a:t>
+            </a:r>
+            <a:r>
+              <a:rPr lang="nl-NL" sz="1800" b="1" u="none" strike="noStrike" dirty="0">
+                <a:solidFill>
+                  <a:schemeClr val="lt1"/>
+                </a:solidFill>
+                <a:effectLst/>
+                <a:uFillTx/>
+                <a:latin typeface="Calibri"/>
+              </a:rPr>
+              <a:t>.</a:t>
             </a:r>
             <a:br>
-              <a:rPr sz="1800"/>
+              <a:rPr sz="1800" dirty="0"/>
             </a:br>
             <a:r>
-              <a:rPr lang="nl-NL" sz="1800" b="1" u="none" strike="noStrike">
+              <a:rPr lang="nl-NL" sz="1800" b="1" u="none" strike="noStrike" dirty="0">
                 <a:solidFill>
                   <a:schemeClr val="lt1"/>
                 </a:solidFill>
@@ -16445,13 +16835,57 @@
                 <a:uFillTx/>
                 <a:latin typeface="Calibri"/>
               </a:rPr>
-              <a:t>- Retrieval-Augmented Generation (RAG)</a:t>
+              <a:t>- Retrieval-</a:t>
+            </a:r>
+            <a:r>
+              <a:rPr lang="nl-NL" sz="1800" b="1" u="none" strike="noStrike" dirty="0" err="1">
+                <a:solidFill>
+                  <a:schemeClr val="lt1"/>
+                </a:solidFill>
+                <a:effectLst/>
+                <a:uFillTx/>
+                <a:latin typeface="Calibri"/>
+              </a:rPr>
+              <a:t>Augmented</a:t>
+            </a:r>
+            <a:r>
+              <a:rPr lang="nl-NL" sz="1800" b="1" u="none" strike="noStrike" dirty="0">
+                <a:solidFill>
+                  <a:schemeClr val="lt1"/>
+                </a:solidFill>
+                <a:effectLst/>
+                <a:uFillTx/>
+                <a:latin typeface="Calibri"/>
+              </a:rPr>
+              <a:t> </a:t>
+            </a:r>
+            <a:r>
+              <a:rPr lang="nl-NL" sz="1800" b="1" u="none" strike="noStrike" dirty="0" err="1">
+                <a:solidFill>
+                  <a:schemeClr val="lt1"/>
+                </a:solidFill>
+                <a:effectLst/>
+                <a:uFillTx/>
+                <a:latin typeface="Calibri"/>
+              </a:rPr>
+              <a:t>Generation</a:t>
+            </a:r>
+            <a:r>
+              <a:rPr lang="nl-NL" sz="1800" b="1" u="none" strike="noStrike" dirty="0">
+                <a:solidFill>
+                  <a:schemeClr val="lt1"/>
+                </a:solidFill>
+                <a:effectLst/>
+                <a:uFillTx/>
+                <a:latin typeface="Calibri"/>
+              </a:rPr>
+              <a:t> (RAG)</a:t>
             </a:r>
             <a:br>
-              <a:rPr sz="1800"/>
+              <a:rPr sz="1800" dirty="0"/>
             </a:br>
             <a:r>
-              <a:rPr lang="nl-NL" sz="1800" b="1" u="none" strike="noStrike">
+              <a:rPr lang="nl-NL" sz="1800" b="1" u="none" strike="noStrike" dirty="0">
                 <a:solidFill>
                   <a:schemeClr val="lt1"/>
                 </a:solidFill>
@@ -16459,13 +16893,46 @@
                 <a:uFillTx/>
                 <a:latin typeface="Calibri"/>
               </a:rPr>
-              <a:t>- Application and gateway integration</a:t>
+              <a:t>- Application </a:t>
+            </a:r>
+            <a:r>
+              <a:rPr lang="nl-NL" sz="1800" b="1" u="none" strike="noStrike" dirty="0" err="1">
+                <a:solidFill>
+                  <a:schemeClr val="lt1"/>
+                </a:solidFill>
+                <a:effectLst/>
+                <a:uFillTx/>
+                <a:latin typeface="Calibri"/>
+              </a:rPr>
+              <a:t>and</a:t>
+            </a:r>
+            <a:r>
+              <a:rPr lang="nl-NL" sz="1800" b="1" u="none" strike="noStrike" dirty="0">
+                <a:solidFill>
+                  <a:schemeClr val="lt1"/>
+                </a:solidFill>
+                <a:effectLst/>
+                <a:uFillTx/>
+                <a:latin typeface="Calibri"/>
+              </a:rPr>
+              <a:t> gateway </a:t>
+            </a:r>
+            <a:r>
+              <a:rPr lang="nl-NL" sz="1800" b="1" u="none" strike="noStrike" dirty="0" err="1">
+                <a:solidFill>
+                  <a:schemeClr val="lt1"/>
+                </a:solidFill>
+                <a:effectLst/>
+                <a:uFillTx/>
+                <a:latin typeface="Calibri"/>
+              </a:rPr>
+              <a:t>integration</a:t>
             </a:r>
             <a:br>
-              <a:rPr sz="1800"/>
+              <a:rPr sz="1800" dirty="0"/>
             </a:br>
             <a:r>
-              <a:rPr lang="nl-NL" sz="1800" b="1" u="none" strike="noStrike">
+              <a:rPr lang="nl-NL" sz="1800" b="1" u="none" strike="noStrike" dirty="0">
                 <a:solidFill>
                   <a:schemeClr val="lt1"/>
                 </a:solidFill>
@@ -16473,13 +16940,57 @@
                 <a:uFillTx/>
                 <a:latin typeface="Calibri"/>
               </a:rPr>
-              <a:t>- Kotlin and Spring Boot</a:t>
+              <a:t>- </a:t>
+            </a:r>
+            <a:r>
+              <a:rPr lang="nl-NL" sz="1800" b="1" u="none" strike="noStrike" dirty="0" err="1">
+                <a:solidFill>
+                  <a:schemeClr val="lt1"/>
+                </a:solidFill>
+                <a:effectLst/>
+                <a:uFillTx/>
+                <a:latin typeface="Calibri"/>
+              </a:rPr>
+              <a:t>Kotlin</a:t>
+            </a:r>
+            <a:r>
+              <a:rPr lang="nl-NL" sz="1800" b="1" u="none" strike="noStrike" dirty="0">
+                <a:solidFill>
+                  <a:schemeClr val="lt1"/>
+                </a:solidFill>
+                <a:effectLst/>
+                <a:uFillTx/>
+                <a:latin typeface="Calibri"/>
+              </a:rPr>
+              <a:t> </a:t>
+            </a:r>
+            <a:r>
+              <a:rPr lang="nl-NL" sz="1800" b="1" u="none" strike="noStrike" dirty="0" err="1">
+                <a:solidFill>
+                  <a:schemeClr val="lt1"/>
+                </a:solidFill>
+                <a:effectLst/>
+                <a:uFillTx/>
+                <a:latin typeface="Calibri"/>
+              </a:rPr>
+              <a:t>and</a:t>
+            </a:r>
+            <a:r>
+              <a:rPr lang="nl-NL" sz="1800" b="1" u="none" strike="noStrike" dirty="0">
+                <a:solidFill>
+                  <a:schemeClr val="lt1"/>
+                </a:solidFill>
+                <a:effectLst/>
+                <a:uFillTx/>
+                <a:latin typeface="Calibri"/>
+              </a:rPr>
+              <a:t> Spring Boot</a:t>
             </a:r>
             <a:br>
-              <a:rPr sz="1800"/>
+              <a:rPr sz="1800" dirty="0"/>
             </a:br>
             <a:r>
-              <a:rPr lang="nl-NL" sz="1800" b="1" u="none" strike="noStrike">
+              <a:rPr lang="nl-NL" sz="1800" b="1" u="none" strike="noStrike" dirty="0">
                 <a:solidFill>
                   <a:schemeClr val="lt1"/>
                 </a:solidFill>
@@ -16487,16 +16998,71 @@
                 <a:uFillTx/>
                 <a:latin typeface="Calibri"/>
               </a:rPr>
-              <a:t>- Practical implementation and deployment</a:t>
+              <a:t>- Practical </a:t>
+            </a:r>
+            <a:r>
+              <a:rPr lang="nl-NL" sz="1800" b="1" u="none" strike="noStrike" dirty="0" err="1">
+                <a:solidFill>
+                  <a:schemeClr val="lt1"/>
+                </a:solidFill>
+                <a:effectLst/>
+                <a:uFillTx/>
+                <a:latin typeface="Calibri"/>
+              </a:rPr>
+              <a:t>implementation</a:t>
+            </a:r>
+            <a:r>
+              <a:rPr lang="nl-NL" sz="1800" b="1" u="none" strike="noStrike" dirty="0">
+                <a:solidFill>
+                  <a:schemeClr val="lt1"/>
+                </a:solidFill>
+                <a:effectLst/>
+                <a:uFillTx/>
+                <a:latin typeface="Calibri"/>
+              </a:rPr>
+              <a:t> </a:t>
+            </a:r>
+            <a:r>
+              <a:rPr lang="nl-NL" sz="1800" b="1" u="none" strike="noStrike" dirty="0" err="1">
+                <a:solidFill>
+                  <a:schemeClr val="lt1"/>
+                </a:solidFill>
+                <a:effectLst/>
+                <a:uFillTx/>
+                <a:latin typeface="Calibri"/>
+              </a:rPr>
+              <a:t>and</a:t>
+            </a:r>
+            <a:r>
+              <a:rPr lang="nl-NL" sz="1800" b="1" u="none" strike="noStrike" dirty="0">
+                <a:solidFill>
+                  <a:schemeClr val="lt1"/>
+                </a:solidFill>
+                <a:effectLst/>
+                <a:uFillTx/>
+                <a:latin typeface="Calibri"/>
+              </a:rPr>
+              <a:t> </a:t>
+            </a:r>
+            <a:r>
+              <a:rPr lang="nl-NL" sz="1800" b="1" u="none" strike="noStrike" dirty="0" err="1">
+                <a:solidFill>
+                  <a:schemeClr val="lt1"/>
+                </a:solidFill>
+                <a:effectLst/>
+                <a:uFillTx/>
+                <a:latin typeface="Calibri"/>
+              </a:rPr>
+              <a:t>deployment</a:t>
             </a:r>
             <a:br>
-              <a:rPr sz="1800"/>
+              <a:rPr sz="1800" dirty="0"/>
             </a:br>
             <a:br>
-              <a:rPr sz="1800"/>
+              <a:rPr sz="1800" dirty="0"/>
             </a:br>
             <a:r>
-              <a:rPr lang="nl-NL" sz="1800" b="1" u="none" strike="noStrike">
+              <a:rPr lang="nl-NL" sz="1800" b="1" u="none" strike="noStrike" dirty="0" err="1">
                 <a:solidFill>
                   <a:schemeClr val="lt1"/>
                 </a:solidFill>
@@ -16504,16 +17070,49 @@
                 <a:uFillTx/>
                 <a:latin typeface="Calibri"/>
               </a:rPr>
-              <a:t>Explore the code on GitHub</a:t>
+              <a:t>Explore</a:t>
+            </a:r>
+            <a:r>
+              <a:rPr lang="nl-NL" sz="1800" b="1" u="none" strike="noStrike" dirty="0">
+                <a:solidFill>
+                  <a:schemeClr val="lt1"/>
+                </a:solidFill>
+                <a:effectLst/>
+                <a:uFillTx/>
+                <a:latin typeface="Calibri"/>
+              </a:rPr>
+              <a:t> </a:t>
+            </a:r>
+            <a:r>
+              <a:rPr lang="nl-NL" sz="1800" b="1" u="none" strike="noStrike" dirty="0" err="1">
+                <a:solidFill>
+                  <a:schemeClr val="lt1"/>
+                </a:solidFill>
+                <a:effectLst/>
+                <a:uFillTx/>
+                <a:latin typeface="Calibri"/>
+              </a:rPr>
+              <a:t>the</a:t>
+            </a:r>
+            <a:r>
+              <a:rPr lang="nl-NL" sz="1800" b="1" u="none" strike="noStrike" dirty="0">
+                <a:solidFill>
+                  <a:schemeClr val="lt1"/>
+                </a:solidFill>
+                <a:effectLst/>
+                <a:uFillTx/>
+                <a:latin typeface="Calibri"/>
+              </a:rPr>
+              <a:t> code on GitHub</a:t>
             </a:r>
             <a:br>
-              <a:rPr sz="1800"/>
+              <a:rPr sz="1800" dirty="0"/>
             </a:br>
             <a:br>
-              <a:rPr sz="1800"/>
+              <a:rPr sz="1800" dirty="0"/>
             </a:br>
             <a:r>
-              <a:rPr lang="nl-NL" sz="1800" b="1" u="none" strike="noStrike">
+              <a:rPr lang="nl-NL" sz="1800" b="1" u="none" strike="noStrike" dirty="0" err="1">
                 <a:solidFill>
                   <a:schemeClr val="lt1"/>
                 </a:solidFill>
@@ -16521,9 +17120,86 @@
                 <a:uFillTx/>
                 <a:latin typeface="Calibri"/>
               </a:rPr>
-              <a:t>https://github.com/jesperancinha/kong-chatbot</a:t>
-            </a:r>
-            <a:endParaRPr lang="en-US" sz="1800" b="0" u="none" strike="noStrike">
+              <a:t>https</a:t>
+            </a:r>
+            <a:r>
+              <a:rPr lang="nl-NL" sz="1800" b="1" u="none" strike="noStrike" dirty="0">
+                <a:solidFill>
+                  <a:schemeClr val="lt1"/>
+                </a:solidFill>
+                <a:effectLst/>
+                <a:uFillTx/>
+                <a:latin typeface="Calibri"/>
+              </a:rPr>
+              <a:t>://</a:t>
+            </a:r>
+            <a:r>
+              <a:rPr lang="nl-NL" sz="1800" b="1" u="none" strike="noStrike" dirty="0" err="1">
+                <a:solidFill>
+                  <a:schemeClr val="lt1"/>
+                </a:solidFill>
+                <a:effectLst/>
+                <a:uFillTx/>
+                <a:latin typeface="Calibri"/>
+              </a:rPr>
+              <a:t>github.com</a:t>
+            </a:r>
+            <a:r>
+              <a:rPr lang="nl-NL" sz="1800" b="1" u="none" strike="noStrike" dirty="0">
+                <a:solidFill>
+                  <a:schemeClr val="lt1"/>
+                </a:solidFill>
+                <a:effectLst/>
+                <a:uFillTx/>
+                <a:latin typeface="Calibri"/>
+              </a:rPr>
+              <a:t>/</a:t>
+            </a:r>
+            <a:r>
+              <a:rPr lang="nl-NL" sz="1800" b="1" u="none" strike="noStrike" dirty="0" err="1">
+                <a:solidFill>
+                  <a:schemeClr val="lt1"/>
+                </a:solidFill>
+                <a:effectLst/>
+                <a:uFillTx/>
+                <a:latin typeface="Calibri"/>
+              </a:rPr>
+              <a:t>jesperancinha</a:t>
+            </a:r>
+            <a:r>
+              <a:rPr lang="nl-NL" sz="1800" b="1" u="none" strike="noStrike" dirty="0">
+                <a:solidFill>
+                  <a:schemeClr val="lt1"/>
+                </a:solidFill>
+                <a:effectLst/>
+                <a:uFillTx/>
+                <a:latin typeface="Calibri"/>
+              </a:rPr>
+              <a:t>/</a:t>
+            </a:r>
+            <a:r>
+              <a:rPr lang="nl-NL" sz="1800" b="1" u="none" strike="noStrike" dirty="0" err="1">
+                <a:solidFill>
+                  <a:schemeClr val="lt1"/>
+                </a:solidFill>
+                <a:effectLst/>
+                <a:uFillTx/>
+                <a:latin typeface="Calibri"/>
+              </a:rPr>
+              <a:t>kong</a:t>
+            </a:r>
+            <a:r>
+              <a:rPr lang="nl-NL" sz="1800" b="1" u="none" strike="noStrike" dirty="0">
+                <a:solidFill>
+                  <a:schemeClr val="lt1"/>
+                </a:solidFill>
+                <a:effectLst/>
+                <a:uFillTx/>
+                <a:latin typeface="Calibri"/>
+              </a:rPr>
+              <a:t>-chatbot</a:t>
+            </a:r>
+            <a:endParaRPr lang="en-US" sz="1800" b="0" u="none" strike="noStrike" dirty="0">
               <a:solidFill>
                 <a:srgbClr val="FFFFFF"/>
               </a:solidFill>
@@ -16905,16 +17581,42 @@
           </a:xfrm>
           <a:prstGeom prst="roundRect">
             <a:avLst>
-              <a:gd name="adj" fmla="val 16667"/>
+              <a:gd name="adj" fmla="val 5735"/>
             </a:avLst>
           </a:prstGeom>
           <a:solidFill>
             <a:srgbClr val="141D33"/>
           </a:solidFill>
           <a:ln w="12700">
-            <a:solidFill>
-              <a:srgbClr val="1A2641"/>
-            </a:solidFill>
+            <a:gradFill>
+              <a:gsLst>
+                <a:gs pos="0">
+                  <a:schemeClr val="accent1">
+                    <a:lumMod val="5000"/>
+                    <a:lumOff val="95000"/>
+                  </a:schemeClr>
+                </a:gs>
+                <a:gs pos="74000">
+                  <a:schemeClr val="accent1">
+                    <a:lumMod val="45000"/>
+                    <a:lumOff val="55000"/>
+                  </a:schemeClr>
+                </a:gs>
+                <a:gs pos="83000">
+                  <a:schemeClr val="accent1">
+                    <a:lumMod val="45000"/>
+                    <a:lumOff val="55000"/>
+                  </a:schemeClr>
+                </a:gs>
+                <a:gs pos="100000">
+                  <a:schemeClr val="accent1">
+                    <a:lumMod val="30000"/>
+                    <a:lumOff val="70000"/>
+                  </a:schemeClr>
+                </a:gs>
+              </a:gsLst>
+              <a:lin ang="5400000" scaled="1"/>
+            </a:gradFill>
             <a:round/>
           </a:ln>
           <a:effectLst>
@@ -17730,16 +18432,42 @@
           </a:xfrm>
           <a:prstGeom prst="roundRect">
             <a:avLst>
-              <a:gd name="adj" fmla="val 16667"/>
+              <a:gd name="adj" fmla="val 6104"/>
             </a:avLst>
           </a:prstGeom>
           <a:solidFill>
             <a:srgbClr val="141D33"/>
           </a:solidFill>
           <a:ln w="12700">
-            <a:solidFill>
-              <a:srgbClr val="1A2641"/>
-            </a:solidFill>
+            <a:gradFill>
+              <a:gsLst>
+                <a:gs pos="0">
+                  <a:schemeClr val="accent1">
+                    <a:lumMod val="5000"/>
+                    <a:lumOff val="95000"/>
+                  </a:schemeClr>
+                </a:gs>
+                <a:gs pos="74000">
+                  <a:schemeClr val="accent1">
+                    <a:lumMod val="45000"/>
+                    <a:lumOff val="55000"/>
+                  </a:schemeClr>
+                </a:gs>
+                <a:gs pos="83000">
+                  <a:schemeClr val="accent1">
+                    <a:lumMod val="45000"/>
+                    <a:lumOff val="55000"/>
+                  </a:schemeClr>
+                </a:gs>
+                <a:gs pos="100000">
+                  <a:schemeClr val="accent1">
+                    <a:lumMod val="30000"/>
+                    <a:lumOff val="70000"/>
+                  </a:schemeClr>
+                </a:gs>
+              </a:gsLst>
+              <a:lin ang="5400000" scaled="1"/>
+            </a:gradFill>
             <a:round/>
           </a:ln>
           <a:effectLst>
@@ -17983,16 +18711,42 @@
           </a:xfrm>
           <a:prstGeom prst="roundRect">
             <a:avLst>
-              <a:gd name="adj" fmla="val 16667"/>
+              <a:gd name="adj" fmla="val 6414"/>
             </a:avLst>
           </a:prstGeom>
           <a:solidFill>
             <a:srgbClr val="111C30"/>
           </a:solidFill>
           <a:ln w="12700">
-            <a:solidFill>
-              <a:srgbClr val="1A2641"/>
-            </a:solidFill>
+            <a:gradFill>
+              <a:gsLst>
+                <a:gs pos="0">
+                  <a:schemeClr val="accent1">
+                    <a:lumMod val="5000"/>
+                    <a:lumOff val="95000"/>
+                  </a:schemeClr>
+                </a:gs>
+                <a:gs pos="74000">
+                  <a:schemeClr val="accent1">
+                    <a:lumMod val="45000"/>
+                    <a:lumOff val="55000"/>
+                  </a:schemeClr>
+                </a:gs>
+                <a:gs pos="83000">
+                  <a:schemeClr val="accent1">
+                    <a:lumMod val="45000"/>
+                    <a:lumOff val="55000"/>
+                  </a:schemeClr>
+                </a:gs>
+                <a:gs pos="100000">
+                  <a:schemeClr val="accent1">
+                    <a:lumMod val="30000"/>
+                    <a:lumOff val="70000"/>
+                  </a:schemeClr>
+                </a:gs>
+              </a:gsLst>
+              <a:lin ang="5400000" scaled="1"/>
+            </a:gradFill>
             <a:round/>
           </a:ln>
           <a:effectLst>
@@ -18902,16 +19656,42 @@
           </a:xfrm>
           <a:prstGeom prst="roundRect">
             <a:avLst>
-              <a:gd name="adj" fmla="val 16667"/>
+              <a:gd name="adj" fmla="val 5767"/>
             </a:avLst>
           </a:prstGeom>
           <a:solidFill>
             <a:srgbClr val="141D33"/>
           </a:solidFill>
           <a:ln w="12700">
-            <a:solidFill>
-              <a:srgbClr val="1A2641"/>
-            </a:solidFill>
+            <a:gradFill>
+              <a:gsLst>
+                <a:gs pos="0">
+                  <a:schemeClr val="accent1">
+                    <a:lumMod val="5000"/>
+                    <a:lumOff val="95000"/>
+                  </a:schemeClr>
+                </a:gs>
+                <a:gs pos="74000">
+                  <a:schemeClr val="accent1">
+                    <a:lumMod val="45000"/>
+                    <a:lumOff val="55000"/>
+                  </a:schemeClr>
+                </a:gs>
+                <a:gs pos="83000">
+                  <a:schemeClr val="accent1">
+                    <a:lumMod val="45000"/>
+                    <a:lumOff val="55000"/>
+                  </a:schemeClr>
+                </a:gs>
+                <a:gs pos="100000">
+                  <a:schemeClr val="accent1">
+                    <a:lumMod val="30000"/>
+                    <a:lumOff val="70000"/>
+                  </a:schemeClr>
+                </a:gs>
+              </a:gsLst>
+              <a:lin ang="5400000" scaled="1"/>
+            </a:gradFill>
             <a:round/>
           </a:ln>
           <a:effectLst>
@@ -19224,16 +20004,42 @@
           </a:xfrm>
           <a:prstGeom prst="roundRect">
             <a:avLst>
-              <a:gd name="adj" fmla="val 16667"/>
+              <a:gd name="adj" fmla="val 7402"/>
             </a:avLst>
           </a:prstGeom>
           <a:solidFill>
             <a:srgbClr val="141D33"/>
           </a:solidFill>
           <a:ln w="12700">
-            <a:solidFill>
-              <a:srgbClr val="1A2641"/>
-            </a:solidFill>
+            <a:gradFill>
+              <a:gsLst>
+                <a:gs pos="0">
+                  <a:schemeClr val="accent1">
+                    <a:lumMod val="5000"/>
+                    <a:lumOff val="95000"/>
+                  </a:schemeClr>
+                </a:gs>
+                <a:gs pos="74000">
+                  <a:schemeClr val="accent1">
+                    <a:lumMod val="45000"/>
+                    <a:lumOff val="55000"/>
+                  </a:schemeClr>
+                </a:gs>
+                <a:gs pos="83000">
+                  <a:schemeClr val="accent1">
+                    <a:lumMod val="45000"/>
+                    <a:lumOff val="55000"/>
+                  </a:schemeClr>
+                </a:gs>
+                <a:gs pos="100000">
+                  <a:schemeClr val="accent1">
+                    <a:lumMod val="30000"/>
+                    <a:lumOff val="70000"/>
+                  </a:schemeClr>
+                </a:gs>
+              </a:gsLst>
+              <a:lin ang="5400000" scaled="1"/>
+            </a:gradFill>
             <a:round/>
           </a:ln>
           <a:effectLst>
@@ -19546,16 +20352,42 @@
           </a:xfrm>
           <a:prstGeom prst="roundRect">
             <a:avLst>
-              <a:gd name="adj" fmla="val 16667"/>
+              <a:gd name="adj" fmla="val 7402"/>
             </a:avLst>
           </a:prstGeom>
           <a:solidFill>
             <a:srgbClr val="141D33"/>
           </a:solidFill>
           <a:ln w="12700">
-            <a:solidFill>
-              <a:srgbClr val="1A2641"/>
-            </a:solidFill>
+            <a:gradFill>
+              <a:gsLst>
+                <a:gs pos="0">
+                  <a:schemeClr val="accent1">
+                    <a:lumMod val="5000"/>
+                    <a:lumOff val="95000"/>
+                  </a:schemeClr>
+                </a:gs>
+                <a:gs pos="74000">
+                  <a:schemeClr val="accent1">
+                    <a:lumMod val="45000"/>
+                    <a:lumOff val="55000"/>
+                  </a:schemeClr>
+                </a:gs>
+                <a:gs pos="83000">
+                  <a:schemeClr val="accent1">
+                    <a:lumMod val="45000"/>
+                    <a:lumOff val="55000"/>
+                  </a:schemeClr>
+                </a:gs>
+                <a:gs pos="100000">
+                  <a:schemeClr val="accent1">
+                    <a:lumMod val="30000"/>
+                    <a:lumOff val="70000"/>
+                  </a:schemeClr>
+                </a:gs>
+              </a:gsLst>
+              <a:lin ang="5400000" scaled="1"/>
+            </a:gradFill>
             <a:round/>
           </a:ln>
           <a:effectLst>
@@ -19868,16 +20700,42 @@
           </a:xfrm>
           <a:prstGeom prst="roundRect">
             <a:avLst>
-              <a:gd name="adj" fmla="val 16667"/>
+              <a:gd name="adj" fmla="val 7947"/>
             </a:avLst>
           </a:prstGeom>
           <a:solidFill>
             <a:srgbClr val="141D33"/>
           </a:solidFill>
           <a:ln w="12700">
-            <a:solidFill>
-              <a:srgbClr val="1A2641"/>
-            </a:solidFill>
+            <a:gradFill>
+              <a:gsLst>
+                <a:gs pos="0">
+                  <a:schemeClr val="accent1">
+                    <a:lumMod val="5000"/>
+                    <a:lumOff val="95000"/>
+                  </a:schemeClr>
+                </a:gs>
+                <a:gs pos="74000">
+                  <a:schemeClr val="accent1">
+                    <a:lumMod val="45000"/>
+                    <a:lumOff val="55000"/>
+                  </a:schemeClr>
+                </a:gs>
+                <a:gs pos="83000">
+                  <a:schemeClr val="accent1">
+                    <a:lumMod val="45000"/>
+                    <a:lumOff val="55000"/>
+                  </a:schemeClr>
+                </a:gs>
+                <a:gs pos="100000">
+                  <a:schemeClr val="accent1">
+                    <a:lumMod val="30000"/>
+                    <a:lumOff val="70000"/>
+                  </a:schemeClr>
+                </a:gs>
+              </a:gsLst>
+              <a:lin ang="5400000" scaled="1"/>
+            </a:gradFill>
             <a:round/>
           </a:ln>
           <a:effectLst>
@@ -21365,16 +22223,42 @@
           </a:xfrm>
           <a:prstGeom prst="roundRect">
             <a:avLst>
-              <a:gd name="adj" fmla="val 16667"/>
+              <a:gd name="adj" fmla="val 8607"/>
             </a:avLst>
           </a:prstGeom>
           <a:solidFill>
             <a:srgbClr val="141D33"/>
           </a:solidFill>
           <a:ln w="12700">
-            <a:solidFill>
-              <a:srgbClr val="1A2641"/>
-            </a:solidFill>
+            <a:gradFill>
+              <a:gsLst>
+                <a:gs pos="0">
+                  <a:schemeClr val="accent1">
+                    <a:lumMod val="5000"/>
+                    <a:lumOff val="95000"/>
+                  </a:schemeClr>
+                </a:gs>
+                <a:gs pos="74000">
+                  <a:schemeClr val="accent1">
+                    <a:lumMod val="45000"/>
+                    <a:lumOff val="55000"/>
+                  </a:schemeClr>
+                </a:gs>
+                <a:gs pos="83000">
+                  <a:schemeClr val="accent1">
+                    <a:lumMod val="45000"/>
+                    <a:lumOff val="55000"/>
+                  </a:schemeClr>
+                </a:gs>
+                <a:gs pos="100000">
+                  <a:schemeClr val="accent1">
+                    <a:lumMod val="30000"/>
+                    <a:lumOff val="70000"/>
+                  </a:schemeClr>
+                </a:gs>
+              </a:gsLst>
+              <a:lin ang="5400000" scaled="1"/>
+            </a:gradFill>
             <a:round/>
           </a:ln>
           <a:effectLst>
@@ -21814,16 +22698,42 @@
           </a:xfrm>
           <a:prstGeom prst="roundRect">
             <a:avLst>
-              <a:gd name="adj" fmla="val 16667"/>
+              <a:gd name="adj" fmla="val 8607"/>
             </a:avLst>
           </a:prstGeom>
           <a:solidFill>
             <a:srgbClr val="141D33"/>
           </a:solidFill>
           <a:ln w="12700">
-            <a:solidFill>
-              <a:srgbClr val="1A2641"/>
-            </a:solidFill>
+            <a:gradFill>
+              <a:gsLst>
+                <a:gs pos="0">
+                  <a:schemeClr val="accent1">
+                    <a:lumMod val="5000"/>
+                    <a:lumOff val="95000"/>
+                  </a:schemeClr>
+                </a:gs>
+                <a:gs pos="74000">
+                  <a:schemeClr val="accent1">
+                    <a:lumMod val="45000"/>
+                    <a:lumOff val="55000"/>
+                  </a:schemeClr>
+                </a:gs>
+                <a:gs pos="83000">
+                  <a:schemeClr val="accent1">
+                    <a:lumMod val="45000"/>
+                    <a:lumOff val="55000"/>
+                  </a:schemeClr>
+                </a:gs>
+                <a:gs pos="100000">
+                  <a:schemeClr val="accent1">
+                    <a:lumMod val="30000"/>
+                    <a:lumOff val="70000"/>
+                  </a:schemeClr>
+                </a:gs>
+              </a:gsLst>
+              <a:lin ang="5400000" scaled="1"/>
+            </a:gradFill>
             <a:round/>
           </a:ln>
           <a:effectLst>
@@ -24812,9 +25722,35 @@
             <a:srgbClr val="141D33"/>
           </a:solidFill>
           <a:ln w="12700">
-            <a:solidFill>
-              <a:srgbClr val="1A2641"/>
-            </a:solidFill>
+            <a:gradFill>
+              <a:gsLst>
+                <a:gs pos="0">
+                  <a:schemeClr val="accent1">
+                    <a:lumMod val="5000"/>
+                    <a:lumOff val="95000"/>
+                  </a:schemeClr>
+                </a:gs>
+                <a:gs pos="74000">
+                  <a:schemeClr val="accent1">
+                    <a:lumMod val="45000"/>
+                    <a:lumOff val="55000"/>
+                  </a:schemeClr>
+                </a:gs>
+                <a:gs pos="83000">
+                  <a:schemeClr val="accent1">
+                    <a:lumMod val="45000"/>
+                    <a:lumOff val="55000"/>
+                  </a:schemeClr>
+                </a:gs>
+                <a:gs pos="100000">
+                  <a:schemeClr val="accent1">
+                    <a:lumMod val="30000"/>
+                    <a:lumOff val="70000"/>
+                  </a:schemeClr>
+                </a:gs>
+              </a:gsLst>
+              <a:lin ang="5400000" scaled="1"/>
+            </a:gradFill>
             <a:round/>
           </a:ln>
           <a:effectLst>
@@ -26204,9 +27140,35 @@
             <a:srgbClr val="141D33"/>
           </a:solidFill>
           <a:ln w="12700">
-            <a:solidFill>
-              <a:srgbClr val="1A2641"/>
-            </a:solidFill>
+            <a:gradFill>
+              <a:gsLst>
+                <a:gs pos="0">
+                  <a:schemeClr val="accent1">
+                    <a:lumMod val="5000"/>
+                    <a:lumOff val="95000"/>
+                  </a:schemeClr>
+                </a:gs>
+                <a:gs pos="74000">
+                  <a:schemeClr val="accent1">
+                    <a:lumMod val="45000"/>
+                    <a:lumOff val="55000"/>
+                  </a:schemeClr>
+                </a:gs>
+                <a:gs pos="83000">
+                  <a:schemeClr val="accent1">
+                    <a:lumMod val="45000"/>
+                    <a:lumOff val="55000"/>
+                  </a:schemeClr>
+                </a:gs>
+                <a:gs pos="100000">
+                  <a:schemeClr val="accent1">
+                    <a:lumMod val="30000"/>
+                    <a:lumOff val="70000"/>
+                  </a:schemeClr>
+                </a:gs>
+              </a:gsLst>
+              <a:lin ang="5400000" scaled="1"/>
+            </a:gradFill>
             <a:round/>
           </a:ln>
           <a:effectLst>
@@ -26526,9 +27488,35 @@
             <a:srgbClr val="141D33"/>
           </a:solidFill>
           <a:ln w="12700">
-            <a:solidFill>
-              <a:srgbClr val="1A2641"/>
-            </a:solidFill>
+            <a:gradFill>
+              <a:gsLst>
+                <a:gs pos="0">
+                  <a:schemeClr val="accent1">
+                    <a:lumMod val="5000"/>
+                    <a:lumOff val="95000"/>
+                  </a:schemeClr>
+                </a:gs>
+                <a:gs pos="74000">
+                  <a:schemeClr val="accent1">
+                    <a:lumMod val="45000"/>
+                    <a:lumOff val="55000"/>
+                  </a:schemeClr>
+                </a:gs>
+                <a:gs pos="83000">
+                  <a:schemeClr val="accent1">
+                    <a:lumMod val="45000"/>
+                    <a:lumOff val="55000"/>
+                  </a:schemeClr>
+                </a:gs>
+                <a:gs pos="100000">
+                  <a:schemeClr val="accent1">
+                    <a:lumMod val="30000"/>
+                    <a:lumOff val="70000"/>
+                  </a:schemeClr>
+                </a:gs>
+              </a:gsLst>
+              <a:lin ang="5400000" scaled="1"/>
+            </a:gradFill>
             <a:round/>
           </a:ln>
           <a:effectLst>
@@ -26848,9 +27836,35 @@
             <a:srgbClr val="141D33"/>
           </a:solidFill>
           <a:ln w="12700">
-            <a:solidFill>
-              <a:srgbClr val="1A2641"/>
-            </a:solidFill>
+            <a:gradFill>
+              <a:gsLst>
+                <a:gs pos="0">
+                  <a:schemeClr val="accent1">
+                    <a:lumMod val="5000"/>
+                    <a:lumOff val="95000"/>
+                  </a:schemeClr>
+                </a:gs>
+                <a:gs pos="74000">
+                  <a:schemeClr val="accent1">
+                    <a:lumMod val="45000"/>
+                    <a:lumOff val="55000"/>
+                  </a:schemeClr>
+                </a:gs>
+                <a:gs pos="83000">
+                  <a:schemeClr val="accent1">
+                    <a:lumMod val="45000"/>
+                    <a:lumOff val="55000"/>
+                  </a:schemeClr>
+                </a:gs>
+                <a:gs pos="100000">
+                  <a:schemeClr val="accent1">
+                    <a:lumMod val="30000"/>
+                    <a:lumOff val="70000"/>
+                  </a:schemeClr>
+                </a:gs>
+              </a:gsLst>
+              <a:lin ang="5400000" scaled="1"/>
+            </a:gradFill>
             <a:round/>
           </a:ln>
           <a:effectLst>
@@ -27170,9 +28184,35 @@
             <a:srgbClr val="141D33"/>
           </a:solidFill>
           <a:ln w="12700">
-            <a:solidFill>
-              <a:srgbClr val="1A2641"/>
-            </a:solidFill>
+            <a:gradFill>
+              <a:gsLst>
+                <a:gs pos="0">
+                  <a:schemeClr val="accent1">
+                    <a:lumMod val="5000"/>
+                    <a:lumOff val="95000"/>
+                  </a:schemeClr>
+                </a:gs>
+                <a:gs pos="74000">
+                  <a:schemeClr val="accent1">
+                    <a:lumMod val="45000"/>
+                    <a:lumOff val="55000"/>
+                  </a:schemeClr>
+                </a:gs>
+                <a:gs pos="83000">
+                  <a:schemeClr val="accent1">
+                    <a:lumMod val="45000"/>
+                    <a:lumOff val="55000"/>
+                  </a:schemeClr>
+                </a:gs>
+                <a:gs pos="100000">
+                  <a:schemeClr val="accent1">
+                    <a:lumMod val="30000"/>
+                    <a:lumOff val="70000"/>
+                  </a:schemeClr>
+                </a:gs>
+              </a:gsLst>
+              <a:lin ang="5400000" scaled="1"/>
+            </a:gradFill>
             <a:round/>
           </a:ln>
           <a:effectLst>
@@ -29249,9 +30289,35 @@
             <a:srgbClr val="141D33"/>
           </a:solidFill>
           <a:ln w="12700">
-            <a:solidFill>
-              <a:srgbClr val="1A2641"/>
-            </a:solidFill>
+            <a:gradFill>
+              <a:gsLst>
+                <a:gs pos="0">
+                  <a:schemeClr val="accent1">
+                    <a:lumMod val="5000"/>
+                    <a:lumOff val="95000"/>
+                  </a:schemeClr>
+                </a:gs>
+                <a:gs pos="74000">
+                  <a:schemeClr val="accent1">
+                    <a:lumMod val="45000"/>
+                    <a:lumOff val="55000"/>
+                  </a:schemeClr>
+                </a:gs>
+                <a:gs pos="83000">
+                  <a:schemeClr val="accent1">
+                    <a:lumMod val="45000"/>
+                    <a:lumOff val="55000"/>
+                  </a:schemeClr>
+                </a:gs>
+                <a:gs pos="100000">
+                  <a:schemeClr val="accent1">
+                    <a:lumMod val="30000"/>
+                    <a:lumOff val="70000"/>
+                  </a:schemeClr>
+                </a:gs>
+              </a:gsLst>
+              <a:lin ang="5400000" scaled="1"/>
+            </a:gradFill>
             <a:round/>
           </a:ln>
           <a:effectLst>
@@ -29504,9 +30570,35 @@
             <a:srgbClr val="141D33"/>
           </a:solidFill>
           <a:ln w="12700">
-            <a:solidFill>
-              <a:srgbClr val="1A2641"/>
-            </a:solidFill>
+            <a:gradFill>
+              <a:gsLst>
+                <a:gs pos="0">
+                  <a:schemeClr val="accent1">
+                    <a:lumMod val="5000"/>
+                    <a:lumOff val="95000"/>
+                  </a:schemeClr>
+                </a:gs>
+                <a:gs pos="74000">
+                  <a:schemeClr val="accent1">
+                    <a:lumMod val="45000"/>
+                    <a:lumOff val="55000"/>
+                  </a:schemeClr>
+                </a:gs>
+                <a:gs pos="83000">
+                  <a:schemeClr val="accent1">
+                    <a:lumMod val="45000"/>
+                    <a:lumOff val="55000"/>
+                  </a:schemeClr>
+                </a:gs>
+                <a:gs pos="100000">
+                  <a:schemeClr val="accent1">
+                    <a:lumMod val="30000"/>
+                    <a:lumOff val="70000"/>
+                  </a:schemeClr>
+                </a:gs>
+              </a:gsLst>
+              <a:lin ang="5400000" scaled="1"/>
+            </a:gradFill>
             <a:round/>
           </a:ln>
           <a:effectLst>

--- a/kong_chatbot_architecture.pptx
+++ b/kong_chatbot_architecture.pptx
@@ -12927,6 +12927,36 @@
           </a:p>
         </p:txBody>
       </p:sp>
+      <p:pic>
+        <p:nvPicPr>
+          <p:cNvPr id="3" name="Afbeelding 2">
+            <a:extLst>
+              <a:ext uri="{FF2B5EF4-FFF2-40B4-BE49-F238E27FC236}">
+                <a16:creationId xmlns:a16="http://schemas.microsoft.com/office/drawing/2014/main" id="{4EFDD9BD-1387-620E-D415-27A20E7D9930}"/>
+              </a:ext>
+            </a:extLst>
+          </p:cNvPr>
+          <p:cNvPicPr>
+            <a:picLocks noChangeAspect="1"/>
+          </p:cNvPicPr>
+          <p:nvPr/>
+        </p:nvPicPr>
+        <p:blipFill>
+          <a:blip r:embed="rId3"/>
+          <a:stretch>
+            <a:fillRect/>
+          </a:stretch>
+        </p:blipFill>
+        <p:spPr>
+          <a:xfrm>
+            <a:off x="10058040" y="428218"/>
+            <a:ext cx="1236062" cy="1236062"/>
+          </a:xfrm>
+          <a:prstGeom prst="rect">
+            <a:avLst/>
+          </a:prstGeom>
+        </p:spPr>
+      </p:pic>
     </p:spTree>
   </p:cSld>
   <p:clrMapOvr>
@@ -23227,6 +23257,186 @@
           </a:p>
         </p:txBody>
       </p:sp>
+      <p:pic>
+        <p:nvPicPr>
+          <p:cNvPr id="2" name="Afbeelding 1">
+            <a:extLst>
+              <a:ext uri="{FF2B5EF4-FFF2-40B4-BE49-F238E27FC236}">
+                <a16:creationId xmlns:a16="http://schemas.microsoft.com/office/drawing/2014/main" id="{3F8323C1-C9B7-7746-670B-EFA53CED3016}"/>
+              </a:ext>
+            </a:extLst>
+          </p:cNvPr>
+          <p:cNvPicPr>
+            <a:picLocks noChangeAspect="1"/>
+          </p:cNvPicPr>
+          <p:nvPr/>
+        </p:nvPicPr>
+        <p:blipFill>
+          <a:blip r:embed="rId3"/>
+          <a:stretch>
+            <a:fillRect/>
+          </a:stretch>
+        </p:blipFill>
+        <p:spPr>
+          <a:xfrm>
+            <a:off x="8809798" y="1841828"/>
+            <a:ext cx="1269525" cy="1269525"/>
+          </a:xfrm>
+          <a:prstGeom prst="rect">
+            <a:avLst/>
+          </a:prstGeom>
+        </p:spPr>
+      </p:pic>
+      <p:pic>
+        <p:nvPicPr>
+          <p:cNvPr id="3" name="Afbeelding 2">
+            <a:extLst>
+              <a:ext uri="{FF2B5EF4-FFF2-40B4-BE49-F238E27FC236}">
+                <a16:creationId xmlns:a16="http://schemas.microsoft.com/office/drawing/2014/main" id="{2869B474-5D07-3CD2-A367-2BC0739D6DF5}"/>
+              </a:ext>
+            </a:extLst>
+          </p:cNvPr>
+          <p:cNvPicPr>
+            <a:picLocks noChangeAspect="1"/>
+          </p:cNvPicPr>
+          <p:nvPr/>
+        </p:nvPicPr>
+        <p:blipFill>
+          <a:blip r:embed="rId4"/>
+          <a:stretch>
+            <a:fillRect/>
+          </a:stretch>
+        </p:blipFill>
+        <p:spPr>
+          <a:xfrm>
+            <a:off x="10422681" y="1965409"/>
+            <a:ext cx="1116760" cy="1116760"/>
+          </a:xfrm>
+          <a:prstGeom prst="rect">
+            <a:avLst/>
+          </a:prstGeom>
+        </p:spPr>
+      </p:pic>
+      <p:pic>
+        <p:nvPicPr>
+          <p:cNvPr id="4" name="Afbeelding 3">
+            <a:extLst>
+              <a:ext uri="{FF2B5EF4-FFF2-40B4-BE49-F238E27FC236}">
+                <a16:creationId xmlns:a16="http://schemas.microsoft.com/office/drawing/2014/main" id="{0E57A84D-3DFA-0ADC-1080-2B049CC1FC89}"/>
+              </a:ext>
+            </a:extLst>
+          </p:cNvPr>
+          <p:cNvPicPr>
+            <a:picLocks noChangeAspect="1"/>
+          </p:cNvPicPr>
+          <p:nvPr/>
+        </p:nvPicPr>
+        <p:blipFill>
+          <a:blip r:embed="rId5"/>
+          <a:stretch>
+            <a:fillRect/>
+          </a:stretch>
+        </p:blipFill>
+        <p:spPr>
+          <a:xfrm>
+            <a:off x="7521757" y="1841828"/>
+            <a:ext cx="1268805" cy="1268805"/>
+          </a:xfrm>
+          <a:prstGeom prst="rect">
+            <a:avLst/>
+          </a:prstGeom>
+        </p:spPr>
+      </p:pic>
+      <p:pic>
+        <p:nvPicPr>
+          <p:cNvPr id="5" name="Afbeelding 4">
+            <a:extLst>
+              <a:ext uri="{FF2B5EF4-FFF2-40B4-BE49-F238E27FC236}">
+                <a16:creationId xmlns:a16="http://schemas.microsoft.com/office/drawing/2014/main" id="{F55DB994-A73A-D6C3-F38F-7B3DB81E2AB8}"/>
+              </a:ext>
+            </a:extLst>
+          </p:cNvPr>
+          <p:cNvPicPr>
+            <a:picLocks noChangeAspect="1"/>
+          </p:cNvPicPr>
+          <p:nvPr/>
+        </p:nvPicPr>
+        <p:blipFill>
+          <a:blip r:embed="rId6"/>
+          <a:stretch>
+            <a:fillRect/>
+          </a:stretch>
+        </p:blipFill>
+        <p:spPr>
+          <a:xfrm>
+            <a:off x="1913500" y="2028007"/>
+            <a:ext cx="984458" cy="984458"/>
+          </a:xfrm>
+          <a:prstGeom prst="rect">
+            <a:avLst/>
+          </a:prstGeom>
+        </p:spPr>
+      </p:pic>
+      <p:pic>
+        <p:nvPicPr>
+          <p:cNvPr id="6" name="Afbeelding 5">
+            <a:extLst>
+              <a:ext uri="{FF2B5EF4-FFF2-40B4-BE49-F238E27FC236}">
+                <a16:creationId xmlns:a16="http://schemas.microsoft.com/office/drawing/2014/main" id="{8FA65FA6-1E75-DD6A-E535-17F88FB1E8CF}"/>
+              </a:ext>
+            </a:extLst>
+          </p:cNvPr>
+          <p:cNvPicPr>
+            <a:picLocks noChangeAspect="1"/>
+          </p:cNvPicPr>
+          <p:nvPr/>
+        </p:nvPicPr>
+        <p:blipFill>
+          <a:blip r:embed="rId5"/>
+          <a:stretch>
+            <a:fillRect/>
+          </a:stretch>
+        </p:blipFill>
+        <p:spPr>
+          <a:xfrm>
+            <a:off x="568995" y="1856977"/>
+            <a:ext cx="1268805" cy="1268805"/>
+          </a:xfrm>
+          <a:prstGeom prst="rect">
+            <a:avLst/>
+          </a:prstGeom>
+        </p:spPr>
+      </p:pic>
+      <p:pic>
+        <p:nvPicPr>
+          <p:cNvPr id="7" name="Afbeelding 6">
+            <a:extLst>
+              <a:ext uri="{FF2B5EF4-FFF2-40B4-BE49-F238E27FC236}">
+                <a16:creationId xmlns:a16="http://schemas.microsoft.com/office/drawing/2014/main" id="{E0B79E9E-8921-3283-8B99-EDEF649F3458}"/>
+              </a:ext>
+            </a:extLst>
+          </p:cNvPr>
+          <p:cNvPicPr>
+            <a:picLocks noChangeAspect="1"/>
+          </p:cNvPicPr>
+          <p:nvPr/>
+        </p:nvPicPr>
+        <p:blipFill>
+          <a:blip r:embed="rId7"/>
+          <a:stretch>
+            <a:fillRect/>
+          </a:stretch>
+        </p:blipFill>
+        <p:spPr>
+          <a:xfrm>
+            <a:off x="3177360" y="2176541"/>
+            <a:ext cx="795047" cy="795047"/>
+          </a:xfrm>
+          <a:prstGeom prst="rect">
+            <a:avLst/>
+          </a:prstGeom>
+        </p:spPr>
+      </p:pic>
     </p:spTree>
   </p:cSld>
   <p:clrMapOvr>
@@ -23598,16 +23808,42 @@
           </a:xfrm>
           <a:prstGeom prst="roundRect">
             <a:avLst>
-              <a:gd name="adj" fmla="val 16667"/>
+              <a:gd name="adj" fmla="val 9140"/>
             </a:avLst>
           </a:prstGeom>
           <a:solidFill>
             <a:srgbClr val="141D33"/>
           </a:solidFill>
           <a:ln w="12700">
-            <a:solidFill>
-              <a:srgbClr val="1A2641"/>
-            </a:solidFill>
+            <a:gradFill>
+              <a:gsLst>
+                <a:gs pos="0">
+                  <a:schemeClr val="accent1">
+                    <a:lumMod val="5000"/>
+                    <a:lumOff val="95000"/>
+                  </a:schemeClr>
+                </a:gs>
+                <a:gs pos="74000">
+                  <a:schemeClr val="accent1">
+                    <a:lumMod val="45000"/>
+                    <a:lumOff val="55000"/>
+                  </a:schemeClr>
+                </a:gs>
+                <a:gs pos="83000">
+                  <a:schemeClr val="accent1">
+                    <a:lumMod val="45000"/>
+                    <a:lumOff val="55000"/>
+                  </a:schemeClr>
+                </a:gs>
+                <a:gs pos="100000">
+                  <a:schemeClr val="accent1">
+                    <a:lumMod val="30000"/>
+                    <a:lumOff val="70000"/>
+                  </a:schemeClr>
+                </a:gs>
+              </a:gsLst>
+              <a:lin ang="5400000" scaled="1"/>
+            </a:gradFill>
             <a:round/>
           </a:ln>
           <a:effectLst>
@@ -24212,16 +24448,42 @@
           </a:xfrm>
           <a:prstGeom prst="roundRect">
             <a:avLst>
-              <a:gd name="adj" fmla="val 16667"/>
+              <a:gd name="adj" fmla="val 6745"/>
             </a:avLst>
           </a:prstGeom>
           <a:solidFill>
             <a:srgbClr val="141D33"/>
           </a:solidFill>
           <a:ln w="12700">
-            <a:solidFill>
-              <a:srgbClr val="1A2641"/>
-            </a:solidFill>
+            <a:gradFill>
+              <a:gsLst>
+                <a:gs pos="0">
+                  <a:schemeClr val="accent1">
+                    <a:lumMod val="5000"/>
+                    <a:lumOff val="95000"/>
+                  </a:schemeClr>
+                </a:gs>
+                <a:gs pos="74000">
+                  <a:schemeClr val="accent1">
+                    <a:lumMod val="45000"/>
+                    <a:lumOff val="55000"/>
+                  </a:schemeClr>
+                </a:gs>
+                <a:gs pos="83000">
+                  <a:schemeClr val="accent1">
+                    <a:lumMod val="45000"/>
+                    <a:lumOff val="55000"/>
+                  </a:schemeClr>
+                </a:gs>
+                <a:gs pos="100000">
+                  <a:schemeClr val="accent1">
+                    <a:lumMod val="30000"/>
+                    <a:lumOff val="70000"/>
+                  </a:schemeClr>
+                </a:gs>
+              </a:gsLst>
+              <a:lin ang="5400000" scaled="1"/>
+            </a:gradFill>
             <a:round/>
           </a:ln>
           <a:effectLst>

--- a/kong_chatbot_architecture.pptx
+++ b/kong_chatbot_architecture.pptx
@@ -11006,7 +11006,7 @@
               </a:lnSpc>
             </a:pPr>
             <a:r>
-              <a:rPr lang="nl-NL" sz="4800" b="1" u="none" strike="noStrike">
+              <a:rPr lang="nl-NL" sz="4800" b="1" u="none" strike="noStrike" dirty="0">
                 <a:solidFill>
                   <a:schemeClr val="lt1"/>
                 </a:solidFill>
@@ -11016,7 +11016,7 @@
               </a:rPr>
               <a:t>Hoe combineer je </a:t>
             </a:r>
-            <a:endParaRPr lang="en-US" sz="4800" b="0" u="none" strike="noStrike">
+            <a:endParaRPr lang="en-US" sz="4800" b="0" u="none" strike="noStrike" dirty="0">
               <a:solidFill>
                 <a:srgbClr val="FFFFFF"/>
               </a:solidFill>
@@ -11032,7 +11032,7 @@
               </a:lnSpc>
             </a:pPr>
             <a:r>
-              <a:rPr lang="nl-NL" sz="4800" b="1" u="none" strike="noStrike">
+              <a:rPr lang="nl-NL" sz="4800" b="1" u="none" strike="noStrike" dirty="0">
                 <a:solidFill>
                   <a:schemeClr val="lt1"/>
                 </a:solidFill>
@@ -11040,9 +11040,31 @@
                 <a:uFillTx/>
                 <a:latin typeface="Calibri"/>
               </a:rPr>
-              <a:t>API Gateway, IaCen Spring bij ontwikkeling van een RAG-chatbot</a:t>
-            </a:r>
-            <a:endParaRPr lang="en-US" sz="4800" b="0" u="none" strike="noStrike">
+              <a:t>API Gateway, </a:t>
+            </a:r>
+            <a:r>
+              <a:rPr lang="nl-NL" sz="4800" b="1" u="none" strike="noStrike" dirty="0" err="1">
+                <a:solidFill>
+                  <a:schemeClr val="lt1"/>
+                </a:solidFill>
+                <a:effectLst/>
+                <a:uFillTx/>
+                <a:latin typeface="Calibri"/>
+              </a:rPr>
+              <a:t>IaC</a:t>
+            </a:r>
+            <a:r>
+              <a:rPr lang="nl-NL" sz="4800" b="1" u="none" strike="noStrike" dirty="0">
+                <a:solidFill>
+                  <a:schemeClr val="lt1"/>
+                </a:solidFill>
+                <a:effectLst/>
+                <a:uFillTx/>
+                <a:latin typeface="Calibri"/>
+              </a:rPr>
+              <a:t>, Spring bij ontwikkeling van een RAG-chatbot</a:t>
+            </a:r>
+            <a:endParaRPr lang="en-US" sz="4800" b="0" u="none" strike="noStrike" dirty="0">
               <a:solidFill>
                 <a:srgbClr val="FFFFFF"/>
               </a:solidFill>
@@ -11058,7 +11080,7 @@
               </a:lnSpc>
             </a:pPr>
             <a:r>
-              <a:rPr lang="nl-NL" sz="4800" b="1" u="none" strike="noStrike">
+              <a:rPr lang="nl-NL" sz="4800" b="1" u="none" strike="noStrike" dirty="0">
                 <a:solidFill>
                   <a:schemeClr val="lt1"/>
                 </a:solidFill>
@@ -11066,9 +11088,20 @@
                 <a:uFillTx/>
                 <a:latin typeface="Calibri"/>
               </a:rPr>
-              <a:t>Joao Esperancinha</a:t>
-            </a:r>
-            <a:endParaRPr lang="en-US" sz="4800" b="0" u="none" strike="noStrike">
+              <a:t>Joao </a:t>
+            </a:r>
+            <a:r>
+              <a:rPr lang="nl-NL" sz="4800" b="1" u="none" strike="noStrike" dirty="0" err="1">
+                <a:solidFill>
+                  <a:schemeClr val="lt1"/>
+                </a:solidFill>
+                <a:effectLst/>
+                <a:uFillTx/>
+                <a:latin typeface="Calibri"/>
+              </a:rPr>
+              <a:t>Esperancinha</a:t>
+            </a:r>
+            <a:endParaRPr lang="en-US" sz="4800" b="0" u="none" strike="noStrike" dirty="0">
               <a:solidFill>
                 <a:srgbClr val="FFFFFF"/>
               </a:solidFill>
